--- a/modulo-05/05.07 - Configurando Tabelas (Cores e Ações)/05.07_Tabelas_cores_ações_e_responsividade.pptx
+++ b/modulo-05/05.07 - Configurando Tabelas (Cores e Ações)/05.07_Tabelas_cores_ações_e_responsividade.pptx
@@ -1639,7 +1639,7 @@
                   <a:srgbClr val="8FA3C7"/>
                 </a:solidFill>
               </a:rPr>
-              <a:t>ABAP Moderno · Módulo 03 — SAP Fiori Elements com OData V4  ·  Aula 7 de 11 — Tabelas: cores e ações</a:t>
+              <a:t>ABAP Moderno · Módulo 05 — SAP Fiori Elements com OData V4  ·  Aula 7 de 11 — Tabelas: cores e ações</a:t>
             </a:r>
             <a:endParaRPr lang="en-US" sz="900" dirty="0"/>
           </a:p>
@@ -1785,7 +1785,7 @@
                   <a:srgbClr val="556B82"/>
                 </a:solidFill>
               </a:rPr>
-              <a:t>ABAP Moderno · Módulo 03 — SAP Fiori Elements com OData V4  ·  Aula 7 de 11 — Tabelas: cores e ações</a:t>
+              <a:t>ABAP Moderno · Módulo 05 — SAP Fiori Elements com OData V4  ·  Aula 7 de 11 — Tabelas: cores e ações</a:t>
             </a:r>
             <a:endParaRPr lang="en-US" sz="900" dirty="0"/>
           </a:p>
@@ -2216,7 +2216,7 @@
                   <a:srgbClr val="89D1FF"/>
                 </a:solidFill>
               </a:rPr>
-              <a:t>MÓDULO 03 · AULA 07 DE 11</a:t>
+              <a:t>MÓDULO 05 · AULA 07 DE 11</a:t>
             </a:r>
             <a:endParaRPr lang="en-US" sz="1400" dirty="0"/>
           </a:p>
@@ -2646,7 +2646,7 @@
                   <a:srgbClr val="8FA3C7"/>
                 </a:solidFill>
               </a:rPr>
-              <a:t>ABAP Moderno · Módulo 03 — SAP Fiori Elements com OData V4 · Design System SAP Horizon</a:t>
+              <a:t>ABAP Moderno · Módulo 05 — SAP Fiori Elements com OData V4 · Design System SAP Horizon</a:t>
             </a:r>
             <a:endParaRPr lang="en-US" sz="1100" dirty="0"/>
           </a:p>
@@ -2753,7 +2753,7 @@
                   <a:srgbClr val="89D1FF"/>
                 </a:solidFill>
               </a:rPr>
-              <a:t>AULA 03.07 · SEÇÃO 3</a:t>
+              <a:t>AULA 05.07 · SEÇÃO 3</a:t>
             </a:r>
             <a:endParaRPr lang="en-US" sz="1300" dirty="0"/>
           </a:p>
@@ -3787,7 +3787,7 @@
         </p:blipFill>
         <p:spPr>
           <a:xfrm>
-            <a:off x="4624730" y="2768727"/>
+            <a:off x="8399069" y="2768727"/>
             <a:ext cx="256032" cy="256032"/>
           </a:xfrm>
           <a:prstGeom prst="rect">
@@ -3811,7 +3811,7 @@
         </p:blipFill>
         <p:spPr>
           <a:xfrm>
-            <a:off x="8399069" y="2768727"/>
+            <a:off x="4624730" y="2768727"/>
             <a:ext cx="256032" cy="256032"/>
           </a:xfrm>
           <a:prstGeom prst="rect">
@@ -3979,7 +3979,7 @@
                   <a:srgbClr val="FFFFFF"/>
                 </a:solidFill>
               </a:rPr>
-              <a:t>O que aprendemos na aula 03.07</a:t>
+              <a:t>O que aprendemos na aula 05.07</a:t>
             </a:r>
             <a:endParaRPr lang="en-US" sz="3200" dirty="0"/>
           </a:p>
@@ -4493,7 +4493,7 @@
                   <a:srgbClr val="89D1FF"/>
                 </a:solidFill>
               </a:rPr>
-              <a:t>Próxima aula · 03.08  </a:t>
+              <a:t>Próxima aula · 05.08  </a:t>
             </a:r>
             <a:r>
               <a:rPr lang="en-US" sz="1500" dirty="0">
@@ -4571,7 +4571,7 @@
         </p:blipFill>
         <p:spPr>
           <a:xfrm>
-            <a:off x="822960" y="2926080"/>
+            <a:off x="6355080" y="2926080"/>
             <a:ext cx="256032" cy="256032"/>
           </a:xfrm>
           <a:prstGeom prst="rect">
@@ -4595,7 +4595,7 @@
         </p:blipFill>
         <p:spPr>
           <a:xfrm>
-            <a:off x="822960" y="3886200"/>
+            <a:off x="822960" y="2926080"/>
             <a:ext cx="256032" cy="256032"/>
           </a:xfrm>
           <a:prstGeom prst="rect">
@@ -4619,7 +4619,7 @@
         </p:blipFill>
         <p:spPr>
           <a:xfrm>
-            <a:off x="6355080" y="2926080"/>
+            <a:off x="822960" y="3886200"/>
             <a:ext cx="256032" cy="256032"/>
           </a:xfrm>
           <a:prstGeom prst="rect">
@@ -4770,7 +4770,7 @@
                   <a:srgbClr val="1D2D3E"/>
                 </a:solidFill>
               </a:rPr>
-              <a:t>Módulo 03 em 11 aulas: Fiori Elements com OData V4</a:t>
+              <a:t>Módulo 05 em 11 aulas: Fiori Elements com OData V4</a:t>
             </a:r>
             <a:endParaRPr lang="en-US" sz="2800" dirty="0"/>
           </a:p>
@@ -6640,7 +6640,7 @@
                   <a:srgbClr val="1D2D3E"/>
                 </a:solidFill>
               </a:rPr>
-              <a:t>pintamos o status das viagens, colocamos um botão Accept Travel na tabela e ajustamos a tabela para telas pequenas.</a:t>
+              <a:t>pintamos o status dos pedidos, colocamos as ações Efetuar Pagamento, Aprovar e Cancelar na tabela e a ajustamos para telas pequenas.</a:t>
             </a:r>
             <a:endParaRPr lang="en-US" sz="1400" dirty="0"/>
           </a:p>
@@ -6662,7 +6662,7 @@
         </p:blipFill>
         <p:spPr>
           <a:xfrm>
-            <a:off x="1696669" y="1847088"/>
+            <a:off x="3576218" y="1847088"/>
             <a:ext cx="347472" cy="347472"/>
           </a:xfrm>
           <a:prstGeom prst="rect">
@@ -6686,7 +6686,7 @@
         </p:blipFill>
         <p:spPr>
           <a:xfrm>
-            <a:off x="3576218" y="1847088"/>
+            <a:off x="1696669" y="1847088"/>
             <a:ext cx="347472" cy="347472"/>
           </a:xfrm>
           <a:prstGeom prst="rect">
@@ -7110,7 +7110,7 @@
                   <a:srgbClr val="556B82"/>
                 </a:solidFill>
               </a:rPr>
-              <a:t>Uma tabela de viagens bem configurada mostra </a:t>
+              <a:t>Uma tabela de pedidos bem configurada mostra </a:t>
             </a:r>
             <a:r>
               <a:rPr lang="en-US" sz="1500" b="1" dirty="0">
@@ -7515,7 +7515,7 @@
         </p:blipFill>
         <p:spPr>
           <a:xfrm>
-            <a:off x="8399069" y="3525266"/>
+            <a:off x="850392" y="3525266"/>
             <a:ext cx="256032" cy="256032"/>
           </a:xfrm>
           <a:prstGeom prst="rect">
@@ -7539,7 +7539,7 @@
         </p:blipFill>
         <p:spPr>
           <a:xfrm>
-            <a:off x="850392" y="3525266"/>
+            <a:off x="8399069" y="3525266"/>
             <a:ext cx="256032" cy="256032"/>
           </a:xfrm>
           <a:prstGeom prst="rect">
@@ -7669,7 +7669,7 @@
                   <a:srgbClr val="89D1FF"/>
                 </a:solidFill>
               </a:rPr>
-              <a:t>AULA 03.07 · SEÇÃO 1</a:t>
+              <a:t>AULA 05.07 · SEÇÃO 1</a:t>
             </a:r>
             <a:endParaRPr lang="en-US" sz="1300" dirty="0"/>
           </a:p>
@@ -8162,7 +8162,7 @@
         <p:spPr>
           <a:xfrm>
             <a:off x="548640" y="1645920"/>
-            <a:ext cx="1894637" cy="274320"/>
+            <a:ext cx="2377440" cy="274320"/>
           </a:xfrm>
           <a:prstGeom prst="roundRect">
             <a:avLst>
@@ -8184,7 +8184,7 @@
         <p:spPr>
           <a:xfrm>
             <a:off x="548640" y="1645920"/>
-            <a:ext cx="1894637" cy="274320"/>
+            <a:ext cx="2377440" cy="274320"/>
           </a:xfrm>
           <a:prstGeom prst="rect">
             <a:avLst/>
@@ -8205,7 +8205,7 @@
                   <a:srgbClr val="0064D9"/>
                 </a:solidFill>
               </a:rPr>
-              <a:t>1 · Campo calculado</a:t>
+              <a:t>1 · Valor vindo dos dados</a:t>
             </a:r>
             <a:endParaRPr lang="en-US" sz="1000" dirty="0"/>
           </a:p>
@@ -8220,11 +8220,11 @@
         <p:spPr>
           <a:xfrm>
             <a:off x="548640" y="2029968"/>
-            <a:ext cx="5410048" cy="2221992"/>
+            <a:ext cx="5410048" cy="2002536"/>
           </a:xfrm>
           <a:prstGeom prst="roundRect">
             <a:avLst>
-              <a:gd name="adj" fmla="val 3292"/>
+              <a:gd name="adj" fmla="val 3653"/>
             </a:avLst>
           </a:prstGeom>
           <a:solidFill>
@@ -8269,7 +8269,7 @@
         <p:spPr>
           <a:xfrm>
             <a:off x="640080" y="2084832"/>
-            <a:ext cx="2775204" cy="292608"/>
+            <a:ext cx="2542032" cy="292608"/>
           </a:xfrm>
           <a:prstGeom prst="rect">
             <a:avLst/>
@@ -8289,7 +8289,7 @@
         <p:spPr>
           <a:xfrm>
             <a:off x="640080" y="2084832"/>
-            <a:ext cx="2775204" cy="27432"/>
+            <a:ext cx="2542032" cy="27432"/>
           </a:xfrm>
           <a:prstGeom prst="rect">
             <a:avLst/>
@@ -8309,7 +8309,7 @@
         <p:spPr>
           <a:xfrm>
             <a:off x="731520" y="2103120"/>
-            <a:ext cx="2592324" cy="274320"/>
+            <a:ext cx="2359152" cy="274320"/>
           </a:xfrm>
           <a:prstGeom prst="rect">
             <a:avLst/>
@@ -8330,7 +8330,7 @@
                   <a:srgbClr val="FFFFFF"/>
                 </a:solidFill>
               </a:rPr>
-              <a:t>zi_fe_travel_######.ddls.asddls</a:t>
+              <a:t>zc_pc_pedido_app.ddls.asddls</a:t>
             </a:r>
             <a:endParaRPr lang="en-US" sz="950" dirty="0"/>
           </a:p>
@@ -8345,7 +8345,7 @@
         <p:spPr>
           <a:xfrm>
             <a:off x="685800" y="2487168"/>
-            <a:ext cx="320040" cy="1673352"/>
+            <a:ext cx="320040" cy="1453896"/>
           </a:xfrm>
           <a:prstGeom prst="rect">
             <a:avLst/>
@@ -8487,7 +8487,7 @@
         <p:spPr>
           <a:xfrm>
             <a:off x="1051560" y="2487168"/>
-            <a:ext cx="4769968" cy="1673352"/>
+            <a:ext cx="4769968" cy="1453896"/>
           </a:xfrm>
           <a:prstGeom prst="rect">
             <a:avLst/>
@@ -8506,37 +8506,15 @@
               <a:buNone/>
             </a:pPr>
             <a:r>
-              <a:rPr lang="en-US" sz="1050" dirty="0">
-                <a:solidFill>
-                  <a:srgbClr val="CCCCCC"/>
-                </a:solidFill>
-                <a:latin typeface="Courier New" pitchFamily="34" charset="0"/>
-                <a:ea typeface="Courier New" pitchFamily="34" charset="-122"/>
-                <a:cs typeface="Courier New" pitchFamily="34" charset="-120"/>
-              </a:rPr>
-              <a:t>case</a:t>
-            </a:r>
-            <a:r>
-              <a:rPr lang="en-US" sz="1050" dirty="0">
-                <a:solidFill>
-                  <a:srgbClr val="CCCCCC"/>
-                </a:solidFill>
-                <a:latin typeface="Courier New" pitchFamily="34" charset="0"/>
-                <a:ea typeface="Courier New" pitchFamily="34" charset="-122"/>
-                <a:cs typeface="Courier New" pitchFamily="34" charset="-120"/>
-              </a:rPr>
-              <a:t> </a:t>
-            </a:r>
-            <a:r>
-              <a:rPr lang="en-US" sz="1050" dirty="0">
-                <a:solidFill>
-                  <a:srgbClr val="CCCCCC"/>
-                </a:solidFill>
-                <a:latin typeface="Courier New" pitchFamily="34" charset="0"/>
-                <a:ea typeface="Courier New" pitchFamily="34" charset="-122"/>
-                <a:cs typeface="Courier New" pitchFamily="34" charset="-120"/>
-              </a:rPr>
-              <a:t>OverallStatus</a:t>
+              <a:rPr lang="en-US" sz="1050" i="1" dirty="0">
+                <a:solidFill>
+                  <a:srgbClr val="6A9955"/>
+                </a:solidFill>
+                <a:latin typeface="Courier New" pitchFamily="34" charset="0"/>
+                <a:ea typeface="Courier New" pitchFamily="34" charset="-122"/>
+                <a:cs typeface="Courier New" pitchFamily="34" charset="-120"/>
+              </a:rPr>
+              <a:t>" ZTA_PC_CODELIST (lista STATUS_PEDIDO):</a:t>
             </a:r>
             <a:endParaRPr lang="en-US" sz="1050" dirty="0"/>
           </a:p>
@@ -8548,147 +8526,15 @@
               <a:buNone/>
             </a:pPr>
             <a:r>
-              <a:rPr lang="en-US" sz="1050" dirty="0">
-                <a:solidFill>
-                  <a:srgbClr val="CCCCCC"/>
-                </a:solidFill>
-                <a:latin typeface="Courier New" pitchFamily="34" charset="0"/>
-                <a:ea typeface="Courier New" pitchFamily="34" charset="-122"/>
-                <a:cs typeface="Courier New" pitchFamily="34" charset="-120"/>
-              </a:rPr>
-              <a:t>  </a:t>
-            </a:r>
-            <a:r>
-              <a:rPr lang="en-US" sz="1050" dirty="0">
-                <a:solidFill>
-                  <a:srgbClr val="CCCCCC"/>
-                </a:solidFill>
-                <a:latin typeface="Courier New" pitchFamily="34" charset="0"/>
-                <a:ea typeface="Courier New" pitchFamily="34" charset="-122"/>
-                <a:cs typeface="Courier New" pitchFamily="34" charset="-120"/>
-              </a:rPr>
-              <a:t>when</a:t>
-            </a:r>
-            <a:r>
-              <a:rPr lang="en-US" sz="1050" dirty="0">
-                <a:solidFill>
-                  <a:srgbClr val="CCCCCC"/>
-                </a:solidFill>
-                <a:latin typeface="Courier New" pitchFamily="34" charset="0"/>
-                <a:ea typeface="Courier New" pitchFamily="34" charset="-122"/>
-                <a:cs typeface="Courier New" pitchFamily="34" charset="-120"/>
-              </a:rPr>
-              <a:t> </a:t>
-            </a:r>
-            <a:r>
-              <a:rPr lang="en-US" sz="1050" dirty="0">
-                <a:solidFill>
-                  <a:srgbClr val="CE9178"/>
-                </a:solidFill>
-                <a:latin typeface="Courier New" pitchFamily="34" charset="0"/>
-                <a:ea typeface="Courier New" pitchFamily="34" charset="-122"/>
-                <a:cs typeface="Courier New" pitchFamily="34" charset="-120"/>
-              </a:rPr>
-              <a:t>'A'</a:t>
-            </a:r>
-            <a:r>
-              <a:rPr lang="en-US" sz="1050" dirty="0">
-                <a:solidFill>
-                  <a:srgbClr val="CCCCCC"/>
-                </a:solidFill>
-                <a:latin typeface="Courier New" pitchFamily="34" charset="0"/>
-                <a:ea typeface="Courier New" pitchFamily="34" charset="-122"/>
-                <a:cs typeface="Courier New" pitchFamily="34" charset="-120"/>
-              </a:rPr>
-              <a:t> </a:t>
-            </a:r>
-            <a:r>
-              <a:rPr lang="en-US" sz="1050" dirty="0">
-                <a:solidFill>
-                  <a:srgbClr val="CCCCCC"/>
-                </a:solidFill>
-                <a:latin typeface="Courier New" pitchFamily="34" charset="0"/>
-                <a:ea typeface="Courier New" pitchFamily="34" charset="-122"/>
-                <a:cs typeface="Courier New" pitchFamily="34" charset="-120"/>
-              </a:rPr>
-              <a:t>then</a:t>
-            </a:r>
-            <a:r>
-              <a:rPr lang="en-US" sz="1050" dirty="0">
-                <a:solidFill>
-                  <a:srgbClr val="CCCCCC"/>
-                </a:solidFill>
-                <a:latin typeface="Courier New" pitchFamily="34" charset="0"/>
-                <a:ea typeface="Courier New" pitchFamily="34" charset="-122"/>
-                <a:cs typeface="Courier New" pitchFamily="34" charset="-120"/>
-              </a:rPr>
-              <a:t> </a:t>
-            </a:r>
-            <a:r>
-              <a:rPr lang="en-US" sz="1050" dirty="0">
-                <a:solidFill>
-                  <a:srgbClr val="B5CEA8"/>
-                </a:solidFill>
-                <a:latin typeface="Courier New" pitchFamily="34" charset="0"/>
-                <a:ea typeface="Courier New" pitchFamily="34" charset="-122"/>
-                <a:cs typeface="Courier New" pitchFamily="34" charset="-120"/>
-              </a:rPr>
-              <a:t>3</a:t>
-            </a:r>
-            <a:r>
-              <a:rPr lang="en-US" sz="1050" dirty="0">
-                <a:solidFill>
-                  <a:srgbClr val="CCCCCC"/>
-                </a:solidFill>
-                <a:latin typeface="Courier New" pitchFamily="34" charset="0"/>
-                <a:ea typeface="Courier New" pitchFamily="34" charset="-122"/>
-                <a:cs typeface="Courier New" pitchFamily="34" charset="-120"/>
-              </a:rPr>
-              <a:t>   </a:t>
-            </a:r>
-            <a:r>
-              <a:rPr lang="en-US" sz="1050" dirty="0">
-                <a:solidFill>
-                  <a:srgbClr val="CCCCCC"/>
-                </a:solidFill>
-                <a:latin typeface="Courier New" pitchFamily="34" charset="0"/>
-                <a:ea typeface="Courier New" pitchFamily="34" charset="-122"/>
-                <a:cs typeface="Courier New" pitchFamily="34" charset="-120"/>
-              </a:rPr>
-              <a:t>-</a:t>
-            </a:r>
-            <a:r>
-              <a:rPr lang="en-US" sz="1050" dirty="0">
-                <a:solidFill>
-                  <a:srgbClr val="CCCCCC"/>
-                </a:solidFill>
-                <a:latin typeface="Courier New" pitchFamily="34" charset="0"/>
-                <a:ea typeface="Courier New" pitchFamily="34" charset="-122"/>
-                <a:cs typeface="Courier New" pitchFamily="34" charset="-120"/>
-              </a:rPr>
-              <a:t>-</a:t>
-            </a:r>
-            <a:r>
-              <a:rPr lang="en-US" sz="1050" dirty="0">
-                <a:solidFill>
-                  <a:srgbClr val="CCCCCC"/>
-                </a:solidFill>
-                <a:latin typeface="Courier New" pitchFamily="34" charset="0"/>
-                <a:ea typeface="Courier New" pitchFamily="34" charset="-122"/>
-                <a:cs typeface="Courier New" pitchFamily="34" charset="-120"/>
-              </a:rPr>
-              <a:t> </a:t>
-            </a:r>
-            <a:r>
-              <a:rPr lang="en-US" sz="1050" dirty="0">
-                <a:solidFill>
-                  <a:srgbClr val="CCCCCC"/>
-                </a:solidFill>
-                <a:latin typeface="Courier New" pitchFamily="34" charset="0"/>
-                <a:ea typeface="Courier New" pitchFamily="34" charset="-122"/>
-                <a:cs typeface="Courier New" pitchFamily="34" charset="-120"/>
-              </a:rPr>
-              <a:t>aceita</a:t>
+              <a:rPr lang="en-US" sz="1050" i="1" dirty="0">
+                <a:solidFill>
+                  <a:srgbClr val="6A9955"/>
+                </a:solidFill>
+                <a:latin typeface="Courier New" pitchFamily="34" charset="0"/>
+                <a:ea typeface="Courier New" pitchFamily="34" charset="-122"/>
+                <a:cs typeface="Courier New" pitchFamily="34" charset="-120"/>
+              </a:rPr>
+              <a:t>"   ABERTO 0 · AGUARDANDO_APROVACAO 2</a:t>
             </a:r>
             <a:endParaRPr lang="en-US" sz="1050" dirty="0"/>
           </a:p>
@@ -8700,147 +8546,15 @@
               <a:buNone/>
             </a:pPr>
             <a:r>
-              <a:rPr lang="en-US" sz="1050" dirty="0">
-                <a:solidFill>
-                  <a:srgbClr val="CCCCCC"/>
-                </a:solidFill>
-                <a:latin typeface="Courier New" pitchFamily="34" charset="0"/>
-                <a:ea typeface="Courier New" pitchFamily="34" charset="-122"/>
-                <a:cs typeface="Courier New" pitchFamily="34" charset="-120"/>
-              </a:rPr>
-              <a:t>  </a:t>
-            </a:r>
-            <a:r>
-              <a:rPr lang="en-US" sz="1050" dirty="0">
-                <a:solidFill>
-                  <a:srgbClr val="CCCCCC"/>
-                </a:solidFill>
-                <a:latin typeface="Courier New" pitchFamily="34" charset="0"/>
-                <a:ea typeface="Courier New" pitchFamily="34" charset="-122"/>
-                <a:cs typeface="Courier New" pitchFamily="34" charset="-120"/>
-              </a:rPr>
-              <a:t>when</a:t>
-            </a:r>
-            <a:r>
-              <a:rPr lang="en-US" sz="1050" dirty="0">
-                <a:solidFill>
-                  <a:srgbClr val="CCCCCC"/>
-                </a:solidFill>
-                <a:latin typeface="Courier New" pitchFamily="34" charset="0"/>
-                <a:ea typeface="Courier New" pitchFamily="34" charset="-122"/>
-                <a:cs typeface="Courier New" pitchFamily="34" charset="-120"/>
-              </a:rPr>
-              <a:t> </a:t>
-            </a:r>
-            <a:r>
-              <a:rPr lang="en-US" sz="1050" dirty="0">
-                <a:solidFill>
-                  <a:srgbClr val="CE9178"/>
-                </a:solidFill>
-                <a:latin typeface="Courier New" pitchFamily="34" charset="0"/>
-                <a:ea typeface="Courier New" pitchFamily="34" charset="-122"/>
-                <a:cs typeface="Courier New" pitchFamily="34" charset="-120"/>
-              </a:rPr>
-              <a:t>'O'</a:t>
-            </a:r>
-            <a:r>
-              <a:rPr lang="en-US" sz="1050" dirty="0">
-                <a:solidFill>
-                  <a:srgbClr val="CCCCCC"/>
-                </a:solidFill>
-                <a:latin typeface="Courier New" pitchFamily="34" charset="0"/>
-                <a:ea typeface="Courier New" pitchFamily="34" charset="-122"/>
-                <a:cs typeface="Courier New" pitchFamily="34" charset="-120"/>
-              </a:rPr>
-              <a:t> </a:t>
-            </a:r>
-            <a:r>
-              <a:rPr lang="en-US" sz="1050" dirty="0">
-                <a:solidFill>
-                  <a:srgbClr val="CCCCCC"/>
-                </a:solidFill>
-                <a:latin typeface="Courier New" pitchFamily="34" charset="0"/>
-                <a:ea typeface="Courier New" pitchFamily="34" charset="-122"/>
-                <a:cs typeface="Courier New" pitchFamily="34" charset="-120"/>
-              </a:rPr>
-              <a:t>then</a:t>
-            </a:r>
-            <a:r>
-              <a:rPr lang="en-US" sz="1050" dirty="0">
-                <a:solidFill>
-                  <a:srgbClr val="CCCCCC"/>
-                </a:solidFill>
-                <a:latin typeface="Courier New" pitchFamily="34" charset="0"/>
-                <a:ea typeface="Courier New" pitchFamily="34" charset="-122"/>
-                <a:cs typeface="Courier New" pitchFamily="34" charset="-120"/>
-              </a:rPr>
-              <a:t> </a:t>
-            </a:r>
-            <a:r>
-              <a:rPr lang="en-US" sz="1050" dirty="0">
-                <a:solidFill>
-                  <a:srgbClr val="B5CEA8"/>
-                </a:solidFill>
-                <a:latin typeface="Courier New" pitchFamily="34" charset="0"/>
-                <a:ea typeface="Courier New" pitchFamily="34" charset="-122"/>
-                <a:cs typeface="Courier New" pitchFamily="34" charset="-120"/>
-              </a:rPr>
-              <a:t>2</a:t>
-            </a:r>
-            <a:r>
-              <a:rPr lang="en-US" sz="1050" dirty="0">
-                <a:solidFill>
-                  <a:srgbClr val="CCCCCC"/>
-                </a:solidFill>
-                <a:latin typeface="Courier New" pitchFamily="34" charset="0"/>
-                <a:ea typeface="Courier New" pitchFamily="34" charset="-122"/>
-                <a:cs typeface="Courier New" pitchFamily="34" charset="-120"/>
-              </a:rPr>
-              <a:t>   </a:t>
-            </a:r>
-            <a:r>
-              <a:rPr lang="en-US" sz="1050" dirty="0">
-                <a:solidFill>
-                  <a:srgbClr val="CCCCCC"/>
-                </a:solidFill>
-                <a:latin typeface="Courier New" pitchFamily="34" charset="0"/>
-                <a:ea typeface="Courier New" pitchFamily="34" charset="-122"/>
-                <a:cs typeface="Courier New" pitchFamily="34" charset="-120"/>
-              </a:rPr>
-              <a:t>-</a:t>
-            </a:r>
-            <a:r>
-              <a:rPr lang="en-US" sz="1050" dirty="0">
-                <a:solidFill>
-                  <a:srgbClr val="CCCCCC"/>
-                </a:solidFill>
-                <a:latin typeface="Courier New" pitchFamily="34" charset="0"/>
-                <a:ea typeface="Courier New" pitchFamily="34" charset="-122"/>
-                <a:cs typeface="Courier New" pitchFamily="34" charset="-120"/>
-              </a:rPr>
-              <a:t>-</a:t>
-            </a:r>
-            <a:r>
-              <a:rPr lang="en-US" sz="1050" dirty="0">
-                <a:solidFill>
-                  <a:srgbClr val="CCCCCC"/>
-                </a:solidFill>
-                <a:latin typeface="Courier New" pitchFamily="34" charset="0"/>
-                <a:ea typeface="Courier New" pitchFamily="34" charset="-122"/>
-                <a:cs typeface="Courier New" pitchFamily="34" charset="-120"/>
-              </a:rPr>
-              <a:t> </a:t>
-            </a:r>
-            <a:r>
-              <a:rPr lang="en-US" sz="1050" dirty="0">
-                <a:solidFill>
-                  <a:srgbClr val="CCCCCC"/>
-                </a:solidFill>
-                <a:latin typeface="Courier New" pitchFamily="34" charset="0"/>
-                <a:ea typeface="Courier New" pitchFamily="34" charset="-122"/>
-                <a:cs typeface="Courier New" pitchFamily="34" charset="-120"/>
-              </a:rPr>
-              <a:t>aberta</a:t>
+              <a:rPr lang="en-US" sz="1050" i="1" dirty="0">
+                <a:solidFill>
+                  <a:srgbClr val="6A9955"/>
+                </a:solidFill>
+                <a:latin typeface="Courier New" pitchFamily="34" charset="0"/>
+                <a:ea typeface="Courier New" pitchFamily="34" charset="-122"/>
+                <a:cs typeface="Courier New" pitchFamily="34" charset="-120"/>
+              </a:rPr>
+              <a:t>"   CANCELADO 1 · FINALIZADO 3</a:t>
             </a:r>
             <a:endParaRPr lang="en-US" sz="1050" dirty="0"/>
           </a:p>
@@ -8854,145 +8568,13 @@
             <a:r>
               <a:rPr lang="en-US" sz="1050" dirty="0">
                 <a:solidFill>
-                  <a:srgbClr val="CCCCCC"/>
-                </a:solidFill>
-                <a:latin typeface="Courier New" pitchFamily="34" charset="0"/>
-                <a:ea typeface="Courier New" pitchFamily="34" charset="-122"/>
-                <a:cs typeface="Courier New" pitchFamily="34" charset="-120"/>
-              </a:rPr>
-              <a:t>  </a:t>
-            </a:r>
-            <a:r>
-              <a:rPr lang="en-US" sz="1050" dirty="0">
-                <a:solidFill>
-                  <a:srgbClr val="CCCCCC"/>
-                </a:solidFill>
-                <a:latin typeface="Courier New" pitchFamily="34" charset="0"/>
-                <a:ea typeface="Courier New" pitchFamily="34" charset="-122"/>
-                <a:cs typeface="Courier New" pitchFamily="34" charset="-120"/>
-              </a:rPr>
-              <a:t>when</a:t>
-            </a:r>
-            <a:r>
-              <a:rPr lang="en-US" sz="1050" dirty="0">
-                <a:solidFill>
-                  <a:srgbClr val="CCCCCC"/>
+                  <a:srgbClr val="000000"/>
                 </a:solidFill>
                 <a:latin typeface="Courier New" pitchFamily="34" charset="0"/>
                 <a:ea typeface="Courier New" pitchFamily="34" charset="-122"/>
                 <a:cs typeface="Courier New" pitchFamily="34" charset="-120"/>
               </a:rPr>
               <a:t> </a:t>
-            </a:r>
-            <a:r>
-              <a:rPr lang="en-US" sz="1050" dirty="0">
-                <a:solidFill>
-                  <a:srgbClr val="CE9178"/>
-                </a:solidFill>
-                <a:latin typeface="Courier New" pitchFamily="34" charset="0"/>
-                <a:ea typeface="Courier New" pitchFamily="34" charset="-122"/>
-                <a:cs typeface="Courier New" pitchFamily="34" charset="-120"/>
-              </a:rPr>
-              <a:t>'X'</a:t>
-            </a:r>
-            <a:r>
-              <a:rPr lang="en-US" sz="1050" dirty="0">
-                <a:solidFill>
-                  <a:srgbClr val="CCCCCC"/>
-                </a:solidFill>
-                <a:latin typeface="Courier New" pitchFamily="34" charset="0"/>
-                <a:ea typeface="Courier New" pitchFamily="34" charset="-122"/>
-                <a:cs typeface="Courier New" pitchFamily="34" charset="-120"/>
-              </a:rPr>
-              <a:t> </a:t>
-            </a:r>
-            <a:r>
-              <a:rPr lang="en-US" sz="1050" dirty="0">
-                <a:solidFill>
-                  <a:srgbClr val="CCCCCC"/>
-                </a:solidFill>
-                <a:latin typeface="Courier New" pitchFamily="34" charset="0"/>
-                <a:ea typeface="Courier New" pitchFamily="34" charset="-122"/>
-                <a:cs typeface="Courier New" pitchFamily="34" charset="-120"/>
-              </a:rPr>
-              <a:t>then</a:t>
-            </a:r>
-            <a:r>
-              <a:rPr lang="en-US" sz="1050" dirty="0">
-                <a:solidFill>
-                  <a:srgbClr val="CCCCCC"/>
-                </a:solidFill>
-                <a:latin typeface="Courier New" pitchFamily="34" charset="0"/>
-                <a:ea typeface="Courier New" pitchFamily="34" charset="-122"/>
-                <a:cs typeface="Courier New" pitchFamily="34" charset="-120"/>
-              </a:rPr>
-              <a:t> </a:t>
-            </a:r>
-            <a:r>
-              <a:rPr lang="en-US" sz="1050" dirty="0">
-                <a:solidFill>
-                  <a:srgbClr val="B5CEA8"/>
-                </a:solidFill>
-                <a:latin typeface="Courier New" pitchFamily="34" charset="0"/>
-                <a:ea typeface="Courier New" pitchFamily="34" charset="-122"/>
-                <a:cs typeface="Courier New" pitchFamily="34" charset="-120"/>
-              </a:rPr>
-              <a:t>1</a:t>
-            </a:r>
-            <a:r>
-              <a:rPr lang="en-US" sz="1050" dirty="0">
-                <a:solidFill>
-                  <a:srgbClr val="CCCCCC"/>
-                </a:solidFill>
-                <a:latin typeface="Courier New" pitchFamily="34" charset="0"/>
-                <a:ea typeface="Courier New" pitchFamily="34" charset="-122"/>
-                <a:cs typeface="Courier New" pitchFamily="34" charset="-120"/>
-              </a:rPr>
-              <a:t>   </a:t>
-            </a:r>
-            <a:r>
-              <a:rPr lang="en-US" sz="1050" dirty="0">
-                <a:solidFill>
-                  <a:srgbClr val="CCCCCC"/>
-                </a:solidFill>
-                <a:latin typeface="Courier New" pitchFamily="34" charset="0"/>
-                <a:ea typeface="Courier New" pitchFamily="34" charset="-122"/>
-                <a:cs typeface="Courier New" pitchFamily="34" charset="-120"/>
-              </a:rPr>
-              <a:t>-</a:t>
-            </a:r>
-            <a:r>
-              <a:rPr lang="en-US" sz="1050" dirty="0">
-                <a:solidFill>
-                  <a:srgbClr val="CCCCCC"/>
-                </a:solidFill>
-                <a:latin typeface="Courier New" pitchFamily="34" charset="0"/>
-                <a:ea typeface="Courier New" pitchFamily="34" charset="-122"/>
-                <a:cs typeface="Courier New" pitchFamily="34" charset="-120"/>
-              </a:rPr>
-              <a:t>-</a:t>
-            </a:r>
-            <a:r>
-              <a:rPr lang="en-US" sz="1050" dirty="0">
-                <a:solidFill>
-                  <a:srgbClr val="CCCCCC"/>
-                </a:solidFill>
-                <a:latin typeface="Courier New" pitchFamily="34" charset="0"/>
-                <a:ea typeface="Courier New" pitchFamily="34" charset="-122"/>
-                <a:cs typeface="Courier New" pitchFamily="34" charset="-120"/>
-              </a:rPr>
-              <a:t> </a:t>
-            </a:r>
-            <a:r>
-              <a:rPr lang="en-US" sz="1050" dirty="0">
-                <a:solidFill>
-                  <a:srgbClr val="CCCCCC"/>
-                </a:solidFill>
-                <a:latin typeface="Courier New" pitchFamily="34" charset="0"/>
-                <a:ea typeface="Courier New" pitchFamily="34" charset="-122"/>
-                <a:cs typeface="Courier New" pitchFamily="34" charset="-120"/>
-              </a:rPr>
-              <a:t>rejeitada</a:t>
             </a:r>
             <a:endParaRPr lang="en-US" sz="1050" dirty="0"/>
           </a:p>
@@ -9012,18 +8594,51 @@
                 <a:ea typeface="Courier New" pitchFamily="34" charset="-122"/>
                 <a:cs typeface="Courier New" pitchFamily="34" charset="-120"/>
               </a:rPr>
-              <a:t>  </a:t>
-            </a:r>
-            <a:r>
-              <a:rPr lang="en-US" sz="1050" dirty="0">
-                <a:solidFill>
-                  <a:srgbClr val="CCCCCC"/>
-                </a:solidFill>
-                <a:latin typeface="Courier New" pitchFamily="34" charset="0"/>
-                <a:ea typeface="Courier New" pitchFamily="34" charset="-122"/>
-                <a:cs typeface="Courier New" pitchFamily="34" charset="-120"/>
-              </a:rPr>
-              <a:t>else</a:t>
+              <a:t>_StatusPedidoTxt</a:t>
+            </a:r>
+            <a:r>
+              <a:rPr lang="en-US" sz="1050" dirty="0">
+                <a:solidFill>
+                  <a:srgbClr val="CCCCCC"/>
+                </a:solidFill>
+                <a:latin typeface="Courier New" pitchFamily="34" charset="0"/>
+                <a:ea typeface="Courier New" pitchFamily="34" charset="-122"/>
+                <a:cs typeface="Courier New" pitchFamily="34" charset="-120"/>
+              </a:rPr>
+              <a:t>.</a:t>
+            </a:r>
+            <a:r>
+              <a:rPr lang="en-US" sz="1050" dirty="0">
+                <a:solidFill>
+                  <a:srgbClr val="CCCCCC"/>
+                </a:solidFill>
+                <a:latin typeface="Courier New" pitchFamily="34" charset="0"/>
+                <a:ea typeface="Courier New" pitchFamily="34" charset="-122"/>
+                <a:cs typeface="Courier New" pitchFamily="34" charset="-120"/>
+              </a:rPr>
+              <a:t>Descricao</a:t>
+            </a:r>
+            <a:r>
+              <a:rPr lang="en-US" sz="1050" dirty="0">
+                <a:solidFill>
+                  <a:srgbClr val="CCCCCC"/>
+                </a:solidFill>
+                <a:latin typeface="Courier New" pitchFamily="34" charset="0"/>
+                <a:ea typeface="Courier New" pitchFamily="34" charset="-122"/>
+                <a:cs typeface="Courier New" pitchFamily="34" charset="-120"/>
+              </a:rPr>
+              <a:t>   </a:t>
+            </a:r>
+            <a:r>
+              <a:rPr lang="en-US" sz="1050" dirty="0">
+                <a:solidFill>
+                  <a:srgbClr val="CCCCCC"/>
+                </a:solidFill>
+                <a:latin typeface="Courier New" pitchFamily="34" charset="0"/>
+                <a:ea typeface="Courier New" pitchFamily="34" charset="-122"/>
+                <a:cs typeface="Courier New" pitchFamily="34" charset="-120"/>
+              </a:rPr>
+              <a:t>as</a:t>
             </a:r>
             <a:r>
               <a:rPr lang="en-US" sz="1050" dirty="0">
@@ -9039,13 +8654,24 @@
             <a:r>
               <a:rPr lang="en-US" sz="1050" dirty="0">
                 <a:solidFill>
-                  <a:srgbClr val="B5CEA8"/>
-                </a:solidFill>
-                <a:latin typeface="Courier New" pitchFamily="34" charset="0"/>
-                <a:ea typeface="Courier New" pitchFamily="34" charset="-122"/>
-                <a:cs typeface="Courier New" pitchFamily="34" charset="-120"/>
-              </a:rPr>
-              <a:t>0</a:t>
+                  <a:srgbClr val="CCCCCC"/>
+                </a:solidFill>
+                <a:latin typeface="Courier New" pitchFamily="34" charset="0"/>
+                <a:ea typeface="Courier New" pitchFamily="34" charset="-122"/>
+                <a:cs typeface="Courier New" pitchFamily="34" charset="-120"/>
+              </a:rPr>
+              <a:t>StatusPedidoTexto</a:t>
+            </a:r>
+            <a:r>
+              <a:rPr lang="en-US" sz="1050" dirty="0">
+                <a:solidFill>
+                  <a:srgbClr val="CCCCCC"/>
+                </a:solidFill>
+                <a:latin typeface="Courier New" pitchFamily="34" charset="0"/>
+                <a:ea typeface="Courier New" pitchFamily="34" charset="-122"/>
+                <a:cs typeface="Courier New" pitchFamily="34" charset="-120"/>
+              </a:rPr>
+              <a:t>,</a:t>
             </a:r>
             <a:endParaRPr lang="en-US" sz="1050" dirty="0"/>
           </a:p>
@@ -9065,7 +8691,29 @@
                 <a:ea typeface="Courier New" pitchFamily="34" charset="-122"/>
                 <a:cs typeface="Courier New" pitchFamily="34" charset="-120"/>
               </a:rPr>
-              <a:t>end</a:t>
+              <a:t>_StatusPedidoTxt</a:t>
+            </a:r>
+            <a:r>
+              <a:rPr lang="en-US" sz="1050" dirty="0">
+                <a:solidFill>
+                  <a:srgbClr val="CCCCCC"/>
+                </a:solidFill>
+                <a:latin typeface="Courier New" pitchFamily="34" charset="0"/>
+                <a:ea typeface="Courier New" pitchFamily="34" charset="-122"/>
+                <a:cs typeface="Courier New" pitchFamily="34" charset="-120"/>
+              </a:rPr>
+              <a:t>.</a:t>
+            </a:r>
+            <a:r>
+              <a:rPr lang="en-US" sz="1050" dirty="0">
+                <a:solidFill>
+                  <a:srgbClr val="CCCCCC"/>
+                </a:solidFill>
+                <a:latin typeface="Courier New" pitchFamily="34" charset="0"/>
+                <a:ea typeface="Courier New" pitchFamily="34" charset="-122"/>
+                <a:cs typeface="Courier New" pitchFamily="34" charset="-120"/>
+              </a:rPr>
+              <a:t>Criticality</a:t>
             </a:r>
             <a:r>
               <a:rPr lang="en-US" sz="1050" dirty="0">
@@ -9109,7 +8757,18 @@
                 <a:ea typeface="Courier New" pitchFamily="34" charset="-122"/>
                 <a:cs typeface="Courier New" pitchFamily="34" charset="-120"/>
               </a:rPr>
-              <a:t>OverallStatusCriticality</a:t>
+              <a:t>StatusPedidoCriticality</a:t>
+            </a:r>
+            <a:r>
+              <a:rPr lang="en-US" sz="1050" dirty="0">
+                <a:solidFill>
+                  <a:srgbClr val="CCCCCC"/>
+                </a:solidFill>
+                <a:latin typeface="Courier New" pitchFamily="34" charset="0"/>
+                <a:ea typeface="Courier New" pitchFamily="34" charset="-122"/>
+                <a:cs typeface="Courier New" pitchFamily="34" charset="-120"/>
+              </a:rPr>
+              <a:t>,</a:t>
             </a:r>
             <a:endParaRPr lang="en-US" sz="1050" dirty="0"/>
           </a:p>
@@ -9123,8 +8782,8 @@
         </p:nvSpPr>
         <p:spPr>
           <a:xfrm>
-            <a:off x="548640" y="4370832"/>
-            <a:ext cx="5410048" cy="1801368"/>
+            <a:off x="548640" y="4151376"/>
+            <a:ext cx="5410048" cy="2020824"/>
           </a:xfrm>
           <a:prstGeom prst="rect">
             <a:avLst/>
@@ -9145,23 +8804,26 @@
                   <a:srgbClr val="556B82"/>
                 </a:solidFill>
               </a:rPr>
-              <a:t>No curso, o campo entra na view do BO e na </a:t>
-            </a:r>
-            <a:r>
-              <a:rPr lang="en-US" sz="1200" b="1" dirty="0">
+              <a:t>No projeto, a cor de cada status fica na lista de códigos, e a projeção lê pela associação. Um </a:t>
+            </a:r>
+            <a:r>
+              <a:rPr lang="en-US" sz="1200" dirty="0">
+                <a:solidFill>
+                  <a:srgbClr val="0064D9"/>
+                </a:solidFill>
+                <a:latin typeface="Courier New" pitchFamily="34" charset="0"/>
+                <a:ea typeface="Courier New" pitchFamily="34" charset="-122"/>
+                <a:cs typeface="Courier New" pitchFamily="34" charset="-120"/>
+              </a:rPr>
+              <a:t>case</a:t>
+            </a:r>
+            <a:r>
+              <a:rPr lang="en-US" sz="1200" dirty="0">
                 <a:solidFill>
                   <a:srgbClr val="556B82"/>
                 </a:solidFill>
               </a:rPr>
-              <a:t>draft table</a:t>
-            </a:r>
-            <a:r>
-              <a:rPr lang="en-US" sz="1200" dirty="0">
-                <a:solidFill>
-                  <a:srgbClr val="556B82"/>
-                </a:solidFill>
-              </a:rPr>
-              <a:t>; a projeção o repassa.</a:t>
+              <a:t> no CDS também serviria.</a:t>
             </a:r>
             <a:endParaRPr lang="en-US" sz="1400" dirty="0"/>
           </a:p>
@@ -9234,11 +8896,11 @@
         <p:spPr>
           <a:xfrm>
             <a:off x="6233008" y="2029968"/>
-            <a:ext cx="5410048" cy="2221992"/>
+            <a:ext cx="5410048" cy="2002536"/>
           </a:xfrm>
           <a:prstGeom prst="roundRect">
             <a:avLst>
-              <a:gd name="adj" fmla="val 3292"/>
+              <a:gd name="adj" fmla="val 3653"/>
             </a:avLst>
           </a:prstGeom>
           <a:solidFill>
@@ -9283,7 +8945,7 @@
         <p:spPr>
           <a:xfrm>
             <a:off x="6324448" y="2084832"/>
-            <a:ext cx="2852928" cy="292608"/>
+            <a:ext cx="2619756" cy="292608"/>
           </a:xfrm>
           <a:prstGeom prst="rect">
             <a:avLst/>
@@ -9303,7 +8965,7 @@
         <p:spPr>
           <a:xfrm>
             <a:off x="6324448" y="2084832"/>
-            <a:ext cx="2852928" cy="27432"/>
+            <a:ext cx="2619756" cy="27432"/>
           </a:xfrm>
           <a:prstGeom prst="rect">
             <a:avLst/>
@@ -9323,7 +8985,7 @@
         <p:spPr>
           <a:xfrm>
             <a:off x="6415888" y="2103120"/>
-            <a:ext cx="2670048" cy="274320"/>
+            <a:ext cx="2436876" cy="274320"/>
           </a:xfrm>
           <a:prstGeom prst="rect">
             <a:avLst/>
@@ -9344,7 +9006,7 @@
                   <a:srgbClr val="FFFFFF"/>
                 </a:solidFill>
               </a:rPr>
-              <a:t>zc_fe_travel_######.ddlx.asddlxs</a:t>
+              <a:t>zc_pc_pedido_app.ddlx.asddlxs</a:t>
             </a:r>
             <a:endParaRPr lang="en-US" sz="950" dirty="0"/>
           </a:p>
@@ -9359,7 +9021,7 @@
         <p:spPr>
           <a:xfrm>
             <a:off x="6370168" y="2487168"/>
-            <a:ext cx="320040" cy="1673352"/>
+            <a:ext cx="320040" cy="1453896"/>
           </a:xfrm>
           <a:prstGeom prst="rect">
             <a:avLst/>
@@ -9490,26 +9152,6 @@
             </a:r>
             <a:endParaRPr lang="en-US" sz="1050" dirty="0"/>
           </a:p>
-          <a:p>
-            <a:pPr algn="r" indent="0" marL="0">
-              <a:lnSpc>
-                <a:spcPct val="105000"/>
-              </a:lnSpc>
-              <a:buNone/>
-            </a:pPr>
-            <a:r>
-              <a:rPr lang="en-US" sz="1050" dirty="0">
-                <a:solidFill>
-                  <a:srgbClr val="6E7681"/>
-                </a:solidFill>
-                <a:latin typeface="Courier New" pitchFamily="34" charset="0"/>
-                <a:ea typeface="Courier New" pitchFamily="34" charset="-122"/>
-                <a:cs typeface="Courier New" pitchFamily="34" charset="-120"/>
-              </a:rPr>
-              <a:t>7</a:t>
-            </a:r>
-            <a:endParaRPr lang="en-US" sz="1050" dirty="0"/>
-          </a:p>
         </p:txBody>
       </p:sp>
       <p:sp>
@@ -9521,7 +9163,7 @@
         <p:spPr>
           <a:xfrm>
             <a:off x="6735928" y="2487168"/>
-            <a:ext cx="4769968" cy="1673352"/>
+            <a:ext cx="4769968" cy="1453896"/>
           </a:xfrm>
           <a:prstGeom prst="rect">
             <a:avLst/>
@@ -9689,7 +9331,73 @@
                 <a:ea typeface="Courier New" pitchFamily="34" charset="-122"/>
                 <a:cs typeface="Courier New" pitchFamily="34" charset="-120"/>
               </a:rPr>
-              <a:t>90</a:t>
+              <a:t>40</a:t>
+            </a:r>
+            <a:r>
+              <a:rPr lang="en-US" sz="1050" dirty="0">
+                <a:solidFill>
+                  <a:srgbClr val="CCCCCC"/>
+                </a:solidFill>
+                <a:latin typeface="Courier New" pitchFamily="34" charset="0"/>
+                <a:ea typeface="Courier New" pitchFamily="34" charset="-122"/>
+                <a:cs typeface="Courier New" pitchFamily="34" charset="-120"/>
+              </a:rPr>
+              <a:t>,</a:t>
+            </a:r>
+            <a:r>
+              <a:rPr lang="en-US" sz="1050" dirty="0">
+                <a:solidFill>
+                  <a:srgbClr val="CCCCCC"/>
+                </a:solidFill>
+                <a:latin typeface="Courier New" pitchFamily="34" charset="0"/>
+                <a:ea typeface="Courier New" pitchFamily="34" charset="-122"/>
+                <a:cs typeface="Courier New" pitchFamily="34" charset="-120"/>
+              </a:rPr>
+              <a:t> </a:t>
+            </a:r>
+            <a:r>
+              <a:rPr lang="en-US" sz="1050" dirty="0">
+                <a:solidFill>
+                  <a:srgbClr val="CCCCCC"/>
+                </a:solidFill>
+                <a:latin typeface="Courier New" pitchFamily="34" charset="0"/>
+                <a:ea typeface="Courier New" pitchFamily="34" charset="-122"/>
+                <a:cs typeface="Courier New" pitchFamily="34" charset="-120"/>
+              </a:rPr>
+              <a:t>label</a:t>
+            </a:r>
+            <a:r>
+              <a:rPr lang="en-US" sz="1050" dirty="0">
+                <a:solidFill>
+                  <a:srgbClr val="CCCCCC"/>
+                </a:solidFill>
+                <a:latin typeface="Courier New" pitchFamily="34" charset="0"/>
+                <a:ea typeface="Courier New" pitchFamily="34" charset="-122"/>
+                <a:cs typeface="Courier New" pitchFamily="34" charset="-120"/>
+              </a:rPr>
+              <a:t>:</a:t>
+            </a:r>
+            <a:r>
+              <a:rPr lang="en-US" sz="1050" dirty="0">
+                <a:solidFill>
+                  <a:srgbClr val="CCCCCC"/>
+                </a:solidFill>
+                <a:latin typeface="Courier New" pitchFamily="34" charset="0"/>
+                <a:ea typeface="Courier New" pitchFamily="34" charset="-122"/>
+                <a:cs typeface="Courier New" pitchFamily="34" charset="-120"/>
+              </a:rPr>
+              <a:t> </a:t>
+            </a:r>
+            <a:r>
+              <a:rPr lang="en-US" sz="1050" dirty="0">
+                <a:solidFill>
+                  <a:srgbClr val="CE9178"/>
+                </a:solidFill>
+                <a:latin typeface="Courier New" pitchFamily="34" charset="0"/>
+                <a:ea typeface="Courier New" pitchFamily="34" charset="-122"/>
+                <a:cs typeface="Courier New" pitchFamily="34" charset="-120"/>
+              </a:rPr>
+              <a:t>'Status do pedido'</a:t>
             </a:r>
             <a:r>
               <a:rPr lang="en-US" sz="1050" dirty="0">
@@ -9764,7 +9472,7 @@
                 <a:ea typeface="Courier New" pitchFamily="34" charset="-122"/>
                 <a:cs typeface="Courier New" pitchFamily="34" charset="-120"/>
               </a:rPr>
-              <a:t>'OverallStatusCriticality'</a:t>
+              <a:t>'StatusPedidoCriticality'</a:t>
             </a:r>
             <a:r>
               <a:rPr lang="en-US" sz="1050" dirty="0">
@@ -9806,7 +9514,7 @@
                 <a:ea typeface="Courier New" pitchFamily="34" charset="-122"/>
                 <a:cs typeface="Courier New" pitchFamily="34" charset="-120"/>
               </a:rPr>
-              <a:t>criticalityRepresentation</a:t>
+              <a:t>importance</a:t>
             </a:r>
             <a:r>
               <a:rPr lang="en-US" sz="1050" dirty="0">
@@ -9850,7 +9558,7 @@
                 <a:ea typeface="Courier New" pitchFamily="34" charset="-122"/>
                 <a:cs typeface="Courier New" pitchFamily="34" charset="-120"/>
               </a:rPr>
-              <a:t>WITH_ICON</a:t>
+              <a:t>HIGH</a:t>
             </a:r>
             <a:endParaRPr lang="en-US" sz="1050" dirty="0"/>
           </a:p>
@@ -9901,104 +9609,7 @@
                 <a:ea typeface="Courier New" pitchFamily="34" charset="-122"/>
                 <a:cs typeface="Courier New" pitchFamily="34" charset="-120"/>
               </a:rPr>
-              <a:t>@</a:t>
-            </a:r>
-            <a:r>
-              <a:rPr lang="en-US" sz="1050" dirty="0">
-                <a:solidFill>
-                  <a:srgbClr val="CCCCCC"/>
-                </a:solidFill>
-                <a:latin typeface="Courier New" pitchFamily="34" charset="0"/>
-                <a:ea typeface="Courier New" pitchFamily="34" charset="-122"/>
-                <a:cs typeface="Courier New" pitchFamily="34" charset="-120"/>
-              </a:rPr>
-              <a:t>UI</a:t>
-            </a:r>
-            <a:r>
-              <a:rPr lang="en-US" sz="1050" dirty="0">
-                <a:solidFill>
-                  <a:srgbClr val="CCCCCC"/>
-                </a:solidFill>
-                <a:latin typeface="Courier New" pitchFamily="34" charset="0"/>
-                <a:ea typeface="Courier New" pitchFamily="34" charset="-122"/>
-                <a:cs typeface="Courier New" pitchFamily="34" charset="-120"/>
-              </a:rPr>
-              <a:t>.</a:t>
-            </a:r>
-            <a:r>
-              <a:rPr lang="en-US" sz="1050" dirty="0">
-                <a:solidFill>
-                  <a:srgbClr val="CCCCCC"/>
-                </a:solidFill>
-                <a:latin typeface="Courier New" pitchFamily="34" charset="0"/>
-                <a:ea typeface="Courier New" pitchFamily="34" charset="-122"/>
-                <a:cs typeface="Courier New" pitchFamily="34" charset="-120"/>
-              </a:rPr>
-              <a:t>textArrangement</a:t>
-            </a:r>
-            <a:r>
-              <a:rPr lang="en-US" sz="1050" dirty="0">
-                <a:solidFill>
-                  <a:srgbClr val="CCCCCC"/>
-                </a:solidFill>
-                <a:latin typeface="Courier New" pitchFamily="34" charset="0"/>
-                <a:ea typeface="Courier New" pitchFamily="34" charset="-122"/>
-                <a:cs typeface="Courier New" pitchFamily="34" charset="-120"/>
-              </a:rPr>
-              <a:t>:</a:t>
-            </a:r>
-            <a:r>
-              <a:rPr lang="en-US" sz="1050" dirty="0">
-                <a:solidFill>
-                  <a:srgbClr val="CCCCCC"/>
-                </a:solidFill>
-                <a:latin typeface="Courier New" pitchFamily="34" charset="0"/>
-                <a:ea typeface="Courier New" pitchFamily="34" charset="-122"/>
-                <a:cs typeface="Courier New" pitchFamily="34" charset="-120"/>
-              </a:rPr>
-              <a:t> </a:t>
-            </a:r>
-            <a:r>
-              <a:rPr lang="en-US" sz="1050" dirty="0">
-                <a:solidFill>
-                  <a:srgbClr val="CCCCCC"/>
-                </a:solidFill>
-                <a:latin typeface="Courier New" pitchFamily="34" charset="0"/>
-                <a:ea typeface="Courier New" pitchFamily="34" charset="-122"/>
-                <a:cs typeface="Courier New" pitchFamily="34" charset="-120"/>
-              </a:rPr>
-              <a:t>#</a:t>
-            </a:r>
-            <a:r>
-              <a:rPr lang="en-US" sz="1050" dirty="0">
-                <a:solidFill>
-                  <a:srgbClr val="CCCCCC"/>
-                </a:solidFill>
-                <a:latin typeface="Courier New" pitchFamily="34" charset="0"/>
-                <a:ea typeface="Courier New" pitchFamily="34" charset="-122"/>
-                <a:cs typeface="Courier New" pitchFamily="34" charset="-120"/>
-              </a:rPr>
-              <a:t>TEXT_ONLY</a:t>
-            </a:r>
-            <a:endParaRPr lang="en-US" sz="1050" dirty="0"/>
-          </a:p>
-          <a:p>
-            <a:pPr indent="0" marL="0">
-              <a:lnSpc>
-                <a:spcPct val="105000"/>
-              </a:lnSpc>
-              <a:buNone/>
-            </a:pPr>
-            <a:r>
-              <a:rPr lang="en-US" sz="1050" dirty="0">
-                <a:solidFill>
-                  <a:srgbClr val="CCCCCC"/>
-                </a:solidFill>
-                <a:latin typeface="Courier New" pitchFamily="34" charset="0"/>
-                <a:ea typeface="Courier New" pitchFamily="34" charset="-122"/>
-                <a:cs typeface="Courier New" pitchFamily="34" charset="-120"/>
-              </a:rPr>
-              <a:t>OverallStatus</a:t>
+              <a:t>StatusPedido</a:t>
             </a:r>
             <a:r>
               <a:rPr lang="en-US" sz="1050" dirty="0">
@@ -10023,8 +9634,8 @@
         </p:nvSpPr>
         <p:spPr>
           <a:xfrm>
-            <a:off x="6233008" y="4370832"/>
-            <a:ext cx="5410048" cy="1801368"/>
+            <a:off x="6233008" y="4151376"/>
+            <a:ext cx="5410048" cy="2020824"/>
           </a:xfrm>
           <a:prstGeom prst="rect">
             <a:avLst/>
@@ -10056,7 +9667,7 @@
                 <a:ea typeface="Courier New" pitchFamily="34" charset="-122"/>
                 <a:cs typeface="Courier New" pitchFamily="34" charset="-120"/>
               </a:rPr>
-              <a:t>#WITHOUT_ICON</a:t>
+              <a:t>criticalityRepresentation: #WITHOUT_ICON</a:t>
             </a:r>
             <a:r>
               <a:rPr lang="en-US" sz="1200" dirty="0">
@@ -10596,7 +10207,7 @@
                             <a:srgbClr val="1D2D3E"/>
                           </a:solidFill>
                         </a:rPr>
-                        <a:t>Sem avaliação</a:t>
+                        <a:t>Aberto</a:t>
                       </a:r>
                       <a:endParaRPr lang="en-US" sz="1200" dirty="0"/>
                     </a:p>
@@ -10770,7 +10381,7 @@
                             <a:srgbClr val="1D2D3E"/>
                           </a:solidFill>
                         </a:rPr>
-                        <a:t>Rejeitada</a:t>
+                        <a:t>Cancelado</a:t>
                       </a:r>
                       <a:endParaRPr lang="en-US" sz="1200" dirty="0"/>
                     </a:p>
@@ -10944,7 +10555,7 @@
                             <a:srgbClr val="1D2D3E"/>
                           </a:solidFill>
                         </a:rPr>
-                        <a:t>Aberta, aguardando</a:t>
+                        <a:t>Aguardando aprovação</a:t>
                       </a:r>
                       <a:endParaRPr lang="en-US" sz="1200" dirty="0"/>
                     </a:p>
@@ -11118,7 +10729,7 @@
                             <a:srgbClr val="1D2D3E"/>
                           </a:solidFill>
                         </a:rPr>
-                        <a:t>Aceita</a:t>
+                        <a:t>Finalizado</a:t>
                       </a:r>
                       <a:endParaRPr lang="en-US" sz="1200" dirty="0"/>
                     </a:p>
@@ -11242,7 +10853,7 @@
                   <a:srgbClr val="1D2D3E"/>
                 </a:solidFill>
               </a:rPr>
-              <a:t>, como o status colorido no header do curso.</a:t>
+              <a:t>, como os status de pedido e pagamento no header da Object Page do projeto.</a:t>
             </a:r>
             <a:endParaRPr lang="en-US" sz="1400" dirty="0"/>
           </a:p>
@@ -11394,7 +11005,7 @@
                   <a:srgbClr val="89D1FF"/>
                 </a:solidFill>
               </a:rPr>
-              <a:t>AULA 03.07 · SEÇÃO 2</a:t>
+              <a:t>AULA 05.07 · SEÇÃO 2</a:t>
             </a:r>
             <a:endParaRPr lang="en-US" sz="1300" dirty="0"/>
           </a:p>
@@ -12298,7 +11909,7 @@
                   <a:srgbClr val="1D2D3E"/>
                 </a:solidFill>
               </a:rPr>
-              <a:t>aceitar</a:t>
+              <a:t>aprovar</a:t>
             </a:r>
             <a:r>
               <a:rPr lang="en-US" sz="1350" dirty="0">
@@ -12314,7 +11925,7 @@
                   <a:srgbClr val="1D2D3E"/>
                 </a:solidFill>
               </a:rPr>
-              <a:t>rejeitar</a:t>
+              <a:t>cancelar</a:t>
             </a:r>
             <a:r>
               <a:rPr lang="en-US" sz="1350" dirty="0">
@@ -12322,7 +11933,7 @@
                   <a:srgbClr val="1D2D3E"/>
                 </a:solidFill>
               </a:rPr>
-              <a:t> uma viagem</a:t>
+              <a:t> um pedido</a:t>
             </a:r>
             <a:endParaRPr lang="en-US" sz="1400" dirty="0"/>
           </a:p>
@@ -12410,7 +12021,7 @@
         </p:blipFill>
         <p:spPr>
           <a:xfrm>
-            <a:off x="6562192" y="3050667"/>
+            <a:off x="877824" y="3050667"/>
             <a:ext cx="256032" cy="256032"/>
           </a:xfrm>
           <a:prstGeom prst="rect">
@@ -12434,7 +12045,7 @@
         </p:blipFill>
         <p:spPr>
           <a:xfrm>
-            <a:off x="877824" y="3050667"/>
+            <a:off x="6562192" y="3050667"/>
             <a:ext cx="256032" cy="256032"/>
           </a:xfrm>
           <a:prstGeom prst="rect">
@@ -12544,7 +12155,7 @@
                   <a:srgbClr val="0064D9"/>
                 </a:solidFill>
               </a:rPr>
-              <a:t>AÇÕES · AÇÃO ACCEPT TRAVEL</a:t>
+              <a:t>AÇÕES · AÇÕES DO PEDIDO</a:t>
             </a:r>
             <a:endParaRPr lang="en-US" sz="1100" dirty="0"/>
           </a:p>
@@ -12704,7 +12315,7 @@
         <p:spPr>
           <a:xfrm>
             <a:off x="640080" y="2084832"/>
-            <a:ext cx="2775204" cy="292608"/>
+            <a:ext cx="2542032" cy="292608"/>
           </a:xfrm>
           <a:prstGeom prst="rect">
             <a:avLst/>
@@ -12724,7 +12335,7 @@
         <p:spPr>
           <a:xfrm>
             <a:off x="640080" y="2084832"/>
-            <a:ext cx="2775204" cy="27432"/>
+            <a:ext cx="2542032" cy="27432"/>
           </a:xfrm>
           <a:prstGeom prst="rect">
             <a:avLst/>
@@ -12744,7 +12355,7 @@
         <p:spPr>
           <a:xfrm>
             <a:off x="731520" y="2103120"/>
-            <a:ext cx="2592324" cy="274320"/>
+            <a:ext cx="2359152" cy="274320"/>
           </a:xfrm>
           <a:prstGeom prst="rect">
             <a:avLst/>
@@ -12765,7 +12376,7 @@
                   <a:srgbClr val="FFFFFF"/>
                 </a:solidFill>
               </a:rPr>
-              <a:t>zc_fe_travel_######.bdef.asbdef</a:t>
+              <a:t>zc_pc_pedido_app.bdef.asbdef</a:t>
             </a:r>
             <a:endParaRPr lang="en-US" sz="950" dirty="0"/>
           </a:p>
@@ -13051,6 +12662,26 @@
             </a:r>
             <a:endParaRPr lang="en-US" sz="1050" dirty="0"/>
           </a:p>
+          <a:p>
+            <a:pPr algn="r" indent="0" marL="0">
+              <a:lnSpc>
+                <a:spcPct val="105000"/>
+              </a:lnSpc>
+              <a:buNone/>
+            </a:pPr>
+            <a:r>
+              <a:rPr lang="en-US" sz="1050" dirty="0">
+                <a:solidFill>
+                  <a:srgbClr val="6E7681"/>
+                </a:solidFill>
+                <a:latin typeface="Courier New" pitchFamily="34" charset="0"/>
+                <a:ea typeface="Courier New" pitchFamily="34" charset="-122"/>
+                <a:cs typeface="Courier New" pitchFamily="34" charset="-120"/>
+              </a:rPr>
+              <a:t>14</a:t>
+            </a:r>
+            <a:endParaRPr lang="en-US" sz="1050" dirty="0"/>
+          </a:p>
         </p:txBody>
       </p:sp>
       <p:sp>
@@ -13356,73 +12987,7 @@
                 <a:ea typeface="Courier New" pitchFamily="34" charset="-122"/>
                 <a:cs typeface="Courier New" pitchFamily="34" charset="-120"/>
               </a:rPr>
-              <a:t>ZC_FE_TRAVEL_</a:t>
-            </a:r>
-            <a:r>
-              <a:rPr lang="en-US" sz="1050" dirty="0">
-                <a:solidFill>
-                  <a:srgbClr val="CCCCCC"/>
-                </a:solidFill>
-                <a:latin typeface="Courier New" pitchFamily="34" charset="0"/>
-                <a:ea typeface="Courier New" pitchFamily="34" charset="-122"/>
-                <a:cs typeface="Courier New" pitchFamily="34" charset="-120"/>
-              </a:rPr>
-              <a:t>#</a:t>
-            </a:r>
-            <a:r>
-              <a:rPr lang="en-US" sz="1050" dirty="0">
-                <a:solidFill>
-                  <a:srgbClr val="CCCCCC"/>
-                </a:solidFill>
-                <a:latin typeface="Courier New" pitchFamily="34" charset="0"/>
-                <a:ea typeface="Courier New" pitchFamily="34" charset="-122"/>
-                <a:cs typeface="Courier New" pitchFamily="34" charset="-120"/>
-              </a:rPr>
-              <a:t>#</a:t>
-            </a:r>
-            <a:r>
-              <a:rPr lang="en-US" sz="1050" dirty="0">
-                <a:solidFill>
-                  <a:srgbClr val="CCCCCC"/>
-                </a:solidFill>
-                <a:latin typeface="Courier New" pitchFamily="34" charset="0"/>
-                <a:ea typeface="Courier New" pitchFamily="34" charset="-122"/>
-                <a:cs typeface="Courier New" pitchFamily="34" charset="-120"/>
-              </a:rPr>
-              <a:t>#</a:t>
-            </a:r>
-            <a:r>
-              <a:rPr lang="en-US" sz="1050" dirty="0">
-                <a:solidFill>
-                  <a:srgbClr val="CCCCCC"/>
-                </a:solidFill>
-                <a:latin typeface="Courier New" pitchFamily="34" charset="0"/>
-                <a:ea typeface="Courier New" pitchFamily="34" charset="-122"/>
-                <a:cs typeface="Courier New" pitchFamily="34" charset="-120"/>
-              </a:rPr>
-              <a:t>#</a:t>
-            </a:r>
-            <a:r>
-              <a:rPr lang="en-US" sz="1050" dirty="0">
-                <a:solidFill>
-                  <a:srgbClr val="CCCCCC"/>
-                </a:solidFill>
-                <a:latin typeface="Courier New" pitchFamily="34" charset="0"/>
-                <a:ea typeface="Courier New" pitchFamily="34" charset="-122"/>
-                <a:cs typeface="Courier New" pitchFamily="34" charset="-120"/>
-              </a:rPr>
-              <a:t>#</a:t>
-            </a:r>
-            <a:r>
-              <a:rPr lang="en-US" sz="1050" dirty="0">
-                <a:solidFill>
-                  <a:srgbClr val="CCCCCC"/>
-                </a:solidFill>
-                <a:latin typeface="Courier New" pitchFamily="34" charset="0"/>
-                <a:ea typeface="Courier New" pitchFamily="34" charset="-122"/>
-                <a:cs typeface="Courier New" pitchFamily="34" charset="-120"/>
-              </a:rPr>
-              <a:t>#</a:t>
+              <a:t>ZC_PC_PEDIDO_APP</a:t>
             </a:r>
             <a:r>
               <a:rPr lang="en-US" sz="1050" dirty="0">
@@ -13466,7 +13031,7 @@
                 <a:ea typeface="Courier New" pitchFamily="34" charset="-122"/>
                 <a:cs typeface="Courier New" pitchFamily="34" charset="-120"/>
               </a:rPr>
-              <a:t>Travel</a:t>
+              <a:t>Pedido</a:t>
             </a:r>
             <a:endParaRPr lang="en-US" sz="1050" dirty="0"/>
           </a:p>
@@ -13753,7 +13318,7 @@
                 <a:ea typeface="Courier New" pitchFamily="34" charset="-122"/>
                 <a:cs typeface="Courier New" pitchFamily="34" charset="-120"/>
               </a:rPr>
-              <a:t>acceptTravel</a:t>
+              <a:t>SimularPagamento</a:t>
             </a:r>
             <a:r>
               <a:rPr lang="en-US" sz="1050" dirty="0">
@@ -13839,7 +13404,7 @@
                 <a:ea typeface="Courier New" pitchFamily="34" charset="-122"/>
                 <a:cs typeface="Courier New" pitchFamily="34" charset="-120"/>
               </a:rPr>
-              <a:t>Edit</a:t>
+              <a:t>AprovarPedido</a:t>
             </a:r>
             <a:r>
               <a:rPr lang="en-US" sz="1050" dirty="0">
@@ -13851,116 +13416,6 @@
                 <a:cs typeface="Courier New" pitchFamily="34" charset="-120"/>
               </a:rPr>
               <a:t>;</a:t>
-            </a:r>
-            <a:r>
-              <a:rPr lang="en-US" sz="1050" dirty="0">
-                <a:solidFill>
-                  <a:srgbClr val="CCCCCC"/>
-                </a:solidFill>
-                <a:latin typeface="Courier New" pitchFamily="34" charset="0"/>
-                <a:ea typeface="Courier New" pitchFamily="34" charset="-122"/>
-                <a:cs typeface="Courier New" pitchFamily="34" charset="-120"/>
-              </a:rPr>
-              <a:t>  </a:t>
-            </a:r>
-            <a:r>
-              <a:rPr lang="en-US" sz="1050" dirty="0">
-                <a:solidFill>
-                  <a:srgbClr val="CCCCCC"/>
-                </a:solidFill>
-                <a:latin typeface="Courier New" pitchFamily="34" charset="0"/>
-                <a:ea typeface="Courier New" pitchFamily="34" charset="-122"/>
-                <a:cs typeface="Courier New" pitchFamily="34" charset="-120"/>
-              </a:rPr>
-              <a:t>//</a:t>
-            </a:r>
-            <a:r>
-              <a:rPr lang="en-US" sz="1050" dirty="0">
-                <a:solidFill>
-                  <a:srgbClr val="CCCCCC"/>
-                </a:solidFill>
-                <a:latin typeface="Courier New" pitchFamily="34" charset="0"/>
-                <a:ea typeface="Courier New" pitchFamily="34" charset="-122"/>
-                <a:cs typeface="Courier New" pitchFamily="34" charset="-120"/>
-              </a:rPr>
-              <a:t> </a:t>
-            </a:r>
-            <a:r>
-              <a:rPr lang="en-US" sz="1050" dirty="0">
-                <a:solidFill>
-                  <a:srgbClr val="CCCCCC"/>
-                </a:solidFill>
-                <a:latin typeface="Courier New" pitchFamily="34" charset="0"/>
-                <a:ea typeface="Courier New" pitchFamily="34" charset="-122"/>
-                <a:cs typeface="Courier New" pitchFamily="34" charset="-120"/>
-              </a:rPr>
-              <a:t>+</a:t>
-            </a:r>
-            <a:r>
-              <a:rPr lang="en-US" sz="1050" dirty="0">
-                <a:solidFill>
-                  <a:srgbClr val="CCCCCC"/>
-                </a:solidFill>
-                <a:latin typeface="Courier New" pitchFamily="34" charset="0"/>
-                <a:ea typeface="Courier New" pitchFamily="34" charset="-122"/>
-                <a:cs typeface="Courier New" pitchFamily="34" charset="-120"/>
-              </a:rPr>
-              <a:t> </a:t>
-            </a:r>
-            <a:r>
-              <a:rPr lang="en-US" sz="1050" dirty="0">
-                <a:solidFill>
-                  <a:srgbClr val="CCCCCC"/>
-                </a:solidFill>
-                <a:latin typeface="Courier New" pitchFamily="34" charset="0"/>
-                <a:ea typeface="Courier New" pitchFamily="34" charset="-122"/>
-                <a:cs typeface="Courier New" pitchFamily="34" charset="-120"/>
-              </a:rPr>
-              <a:t>Activate</a:t>
-            </a:r>
-            <a:r>
-              <a:rPr lang="en-US" sz="1050" dirty="0">
-                <a:solidFill>
-                  <a:srgbClr val="CCCCCC"/>
-                </a:solidFill>
-                <a:latin typeface="Courier New" pitchFamily="34" charset="0"/>
-                <a:ea typeface="Courier New" pitchFamily="34" charset="-122"/>
-                <a:cs typeface="Courier New" pitchFamily="34" charset="-120"/>
-              </a:rPr>
-              <a:t>,</a:t>
-            </a:r>
-            <a:r>
-              <a:rPr lang="en-US" sz="1050" dirty="0">
-                <a:solidFill>
-                  <a:srgbClr val="CCCCCC"/>
-                </a:solidFill>
-                <a:latin typeface="Courier New" pitchFamily="34" charset="0"/>
-                <a:ea typeface="Courier New" pitchFamily="34" charset="-122"/>
-                <a:cs typeface="Courier New" pitchFamily="34" charset="-120"/>
-              </a:rPr>
-              <a:t> </a:t>
-            </a:r>
-            <a:r>
-              <a:rPr lang="en-US" sz="1050" dirty="0">
-                <a:solidFill>
-                  <a:srgbClr val="CCCCCC"/>
-                </a:solidFill>
-                <a:latin typeface="Courier New" pitchFamily="34" charset="0"/>
-                <a:ea typeface="Courier New" pitchFamily="34" charset="-122"/>
-                <a:cs typeface="Courier New" pitchFamily="34" charset="-120"/>
-              </a:rPr>
-              <a:t>Discard</a:t>
-            </a:r>
-            <a:r>
-              <a:rPr lang="en-US" sz="1050" dirty="0">
-                <a:solidFill>
-                  <a:srgbClr val="CCCCCC"/>
-                </a:solidFill>
-                <a:latin typeface="Courier New" pitchFamily="34" charset="0"/>
-                <a:ea typeface="Courier New" pitchFamily="34" charset="-122"/>
-                <a:cs typeface="Courier New" pitchFamily="34" charset="-120"/>
-              </a:rPr>
-              <a:t>,</a:t>
             </a:r>
             <a:endParaRPr lang="en-US" sz="1050" dirty="0"/>
           </a:p>
@@ -13980,51 +13435,18 @@
                 <a:ea typeface="Courier New" pitchFamily="34" charset="-122"/>
                 <a:cs typeface="Courier New" pitchFamily="34" charset="-120"/>
               </a:rPr>
-              <a:t>                    </a:t>
-            </a:r>
-            <a:r>
-              <a:rPr lang="en-US" sz="1050" dirty="0">
-                <a:solidFill>
-                  <a:srgbClr val="CCCCCC"/>
-                </a:solidFill>
-                <a:latin typeface="Courier New" pitchFamily="34" charset="0"/>
-                <a:ea typeface="Courier New" pitchFamily="34" charset="-122"/>
-                <a:cs typeface="Courier New" pitchFamily="34" charset="-120"/>
-              </a:rPr>
-              <a:t>//</a:t>
-            </a:r>
-            <a:r>
-              <a:rPr lang="en-US" sz="1050" dirty="0">
-                <a:solidFill>
-                  <a:srgbClr val="CCCCCC"/>
-                </a:solidFill>
-                <a:latin typeface="Courier New" pitchFamily="34" charset="0"/>
-                <a:ea typeface="Courier New" pitchFamily="34" charset="-122"/>
-                <a:cs typeface="Courier New" pitchFamily="34" charset="-120"/>
-              </a:rPr>
-              <a:t>   </a:t>
-            </a:r>
-            <a:r>
-              <a:rPr lang="en-US" sz="1050" dirty="0">
-                <a:solidFill>
-                  <a:srgbClr val="CCCCCC"/>
-                </a:solidFill>
-                <a:latin typeface="Courier New" pitchFamily="34" charset="0"/>
-                <a:ea typeface="Courier New" pitchFamily="34" charset="-122"/>
-                <a:cs typeface="Courier New" pitchFamily="34" charset="-120"/>
-              </a:rPr>
-              <a:t>Resume</a:t>
-            </a:r>
-            <a:r>
-              <a:rPr lang="en-US" sz="1050" dirty="0">
-                <a:solidFill>
-                  <a:srgbClr val="CCCCCC"/>
-                </a:solidFill>
-                <a:latin typeface="Courier New" pitchFamily="34" charset="0"/>
-                <a:ea typeface="Courier New" pitchFamily="34" charset="-122"/>
-                <a:cs typeface="Courier New" pitchFamily="34" charset="-120"/>
-              </a:rPr>
-              <a:t>,</a:t>
+              <a:t>  </a:t>
+            </a:r>
+            <a:r>
+              <a:rPr lang="en-US" sz="1050" dirty="0">
+                <a:solidFill>
+                  <a:srgbClr val="CCCCCC"/>
+                </a:solidFill>
+                <a:latin typeface="Courier New" pitchFamily="34" charset="0"/>
+                <a:ea typeface="Courier New" pitchFamily="34" charset="-122"/>
+                <a:cs typeface="Courier New" pitchFamily="34" charset="-120"/>
+              </a:rPr>
+              <a:t>use</a:t>
             </a:r>
             <a:r>
               <a:rPr lang="en-US" sz="1050" dirty="0">
@@ -14046,7 +13468,7 @@
                 <a:ea typeface="Courier New" pitchFamily="34" charset="-122"/>
                 <a:cs typeface="Courier New" pitchFamily="34" charset="-120"/>
               </a:rPr>
-              <a:t>Prepare</a:t>
+              <a:t>action</a:t>
             </a:r>
             <a:r>
               <a:rPr lang="en-US" sz="1050" dirty="0">
@@ -14068,29 +13490,18 @@
                 <a:ea typeface="Courier New" pitchFamily="34" charset="-122"/>
                 <a:cs typeface="Courier New" pitchFamily="34" charset="-120"/>
               </a:rPr>
-              <a:t>(</a:t>
-            </a:r>
-            <a:r>
-              <a:rPr lang="en-US" sz="1050" dirty="0">
-                <a:solidFill>
-                  <a:srgbClr val="CCCCCC"/>
-                </a:solidFill>
-                <a:latin typeface="Courier New" pitchFamily="34" charset="0"/>
-                <a:ea typeface="Courier New" pitchFamily="34" charset="-122"/>
-                <a:cs typeface="Courier New" pitchFamily="34" charset="-120"/>
-              </a:rPr>
-              <a:t>draft</a:t>
-            </a:r>
-            <a:r>
-              <a:rPr lang="en-US" sz="1050" dirty="0">
-                <a:solidFill>
-                  <a:srgbClr val="CCCCCC"/>
-                </a:solidFill>
-                <a:latin typeface="Courier New" pitchFamily="34" charset="0"/>
-                <a:ea typeface="Courier New" pitchFamily="34" charset="-122"/>
-                <a:cs typeface="Courier New" pitchFamily="34" charset="-120"/>
-              </a:rPr>
-              <a:t>)</a:t>
+              <a:t>CancelarPedido</a:t>
+            </a:r>
+            <a:r>
+              <a:rPr lang="en-US" sz="1050" dirty="0">
+                <a:solidFill>
+                  <a:srgbClr val="CCCCCC"/>
+                </a:solidFill>
+                <a:latin typeface="Courier New" pitchFamily="34" charset="0"/>
+                <a:ea typeface="Courier New" pitchFamily="34" charset="-122"/>
+                <a:cs typeface="Courier New" pitchFamily="34" charset="-120"/>
+              </a:rPr>
+              <a:t>;</a:t>
             </a:r>
             <a:endParaRPr lang="en-US" sz="1050" dirty="0"/>
           </a:p>
@@ -14110,6 +13521,257 @@
                 <a:ea typeface="Courier New" pitchFamily="34" charset="-122"/>
                 <a:cs typeface="Courier New" pitchFamily="34" charset="-120"/>
               </a:rPr>
+              <a:t>  </a:t>
+            </a:r>
+            <a:r>
+              <a:rPr lang="en-US" sz="1050" dirty="0">
+                <a:solidFill>
+                  <a:srgbClr val="CCCCCC"/>
+                </a:solidFill>
+                <a:latin typeface="Courier New" pitchFamily="34" charset="0"/>
+                <a:ea typeface="Courier New" pitchFamily="34" charset="-122"/>
+                <a:cs typeface="Courier New" pitchFamily="34" charset="-120"/>
+              </a:rPr>
+              <a:t>use</a:t>
+            </a:r>
+            <a:r>
+              <a:rPr lang="en-US" sz="1050" dirty="0">
+                <a:solidFill>
+                  <a:srgbClr val="CCCCCC"/>
+                </a:solidFill>
+                <a:latin typeface="Courier New" pitchFamily="34" charset="0"/>
+                <a:ea typeface="Courier New" pitchFamily="34" charset="-122"/>
+                <a:cs typeface="Courier New" pitchFamily="34" charset="-120"/>
+              </a:rPr>
+              <a:t> </a:t>
+            </a:r>
+            <a:r>
+              <a:rPr lang="en-US" sz="1050" dirty="0">
+                <a:solidFill>
+                  <a:srgbClr val="CCCCCC"/>
+                </a:solidFill>
+                <a:latin typeface="Courier New" pitchFamily="34" charset="0"/>
+                <a:ea typeface="Courier New" pitchFamily="34" charset="-122"/>
+                <a:cs typeface="Courier New" pitchFamily="34" charset="-120"/>
+              </a:rPr>
+              <a:t>action</a:t>
+            </a:r>
+            <a:r>
+              <a:rPr lang="en-US" sz="1050" dirty="0">
+                <a:solidFill>
+                  <a:srgbClr val="CCCCCC"/>
+                </a:solidFill>
+                <a:latin typeface="Courier New" pitchFamily="34" charset="0"/>
+                <a:ea typeface="Courier New" pitchFamily="34" charset="-122"/>
+                <a:cs typeface="Courier New" pitchFamily="34" charset="-120"/>
+              </a:rPr>
+              <a:t> </a:t>
+            </a:r>
+            <a:r>
+              <a:rPr lang="en-US" sz="1050" dirty="0">
+                <a:solidFill>
+                  <a:srgbClr val="CCCCCC"/>
+                </a:solidFill>
+                <a:latin typeface="Courier New" pitchFamily="34" charset="0"/>
+                <a:ea typeface="Courier New" pitchFamily="34" charset="-122"/>
+                <a:cs typeface="Courier New" pitchFamily="34" charset="-120"/>
+              </a:rPr>
+              <a:t>Edit</a:t>
+            </a:r>
+            <a:r>
+              <a:rPr lang="en-US" sz="1050" dirty="0">
+                <a:solidFill>
+                  <a:srgbClr val="CCCCCC"/>
+                </a:solidFill>
+                <a:latin typeface="Courier New" pitchFamily="34" charset="0"/>
+                <a:ea typeface="Courier New" pitchFamily="34" charset="-122"/>
+                <a:cs typeface="Courier New" pitchFamily="34" charset="-120"/>
+              </a:rPr>
+              <a:t>;</a:t>
+            </a:r>
+            <a:r>
+              <a:rPr lang="en-US" sz="1050" dirty="0">
+                <a:solidFill>
+                  <a:srgbClr val="CCCCCC"/>
+                </a:solidFill>
+                <a:latin typeface="Courier New" pitchFamily="34" charset="0"/>
+                <a:ea typeface="Courier New" pitchFamily="34" charset="-122"/>
+                <a:cs typeface="Courier New" pitchFamily="34" charset="-120"/>
+              </a:rPr>
+              <a:t>  </a:t>
+            </a:r>
+            <a:r>
+              <a:rPr lang="en-US" sz="1050" dirty="0">
+                <a:solidFill>
+                  <a:srgbClr val="CCCCCC"/>
+                </a:solidFill>
+                <a:latin typeface="Courier New" pitchFamily="34" charset="0"/>
+                <a:ea typeface="Courier New" pitchFamily="34" charset="-122"/>
+                <a:cs typeface="Courier New" pitchFamily="34" charset="-120"/>
+              </a:rPr>
+              <a:t>//</a:t>
+            </a:r>
+            <a:r>
+              <a:rPr lang="en-US" sz="1050" dirty="0">
+                <a:solidFill>
+                  <a:srgbClr val="CCCCCC"/>
+                </a:solidFill>
+                <a:latin typeface="Courier New" pitchFamily="34" charset="0"/>
+                <a:ea typeface="Courier New" pitchFamily="34" charset="-122"/>
+                <a:cs typeface="Courier New" pitchFamily="34" charset="-120"/>
+              </a:rPr>
+              <a:t> </a:t>
+            </a:r>
+            <a:r>
+              <a:rPr lang="en-US" sz="1050" dirty="0">
+                <a:solidFill>
+                  <a:srgbClr val="CCCCCC"/>
+                </a:solidFill>
+                <a:latin typeface="Courier New" pitchFamily="34" charset="0"/>
+                <a:ea typeface="Courier New" pitchFamily="34" charset="-122"/>
+                <a:cs typeface="Courier New" pitchFamily="34" charset="-120"/>
+              </a:rPr>
+              <a:t>+</a:t>
+            </a:r>
+            <a:r>
+              <a:rPr lang="en-US" sz="1050" dirty="0">
+                <a:solidFill>
+                  <a:srgbClr val="CCCCCC"/>
+                </a:solidFill>
+                <a:latin typeface="Courier New" pitchFamily="34" charset="0"/>
+                <a:ea typeface="Courier New" pitchFamily="34" charset="-122"/>
+                <a:cs typeface="Courier New" pitchFamily="34" charset="-120"/>
+              </a:rPr>
+              <a:t> </a:t>
+            </a:r>
+            <a:r>
+              <a:rPr lang="en-US" sz="1050" dirty="0">
+                <a:solidFill>
+                  <a:srgbClr val="CCCCCC"/>
+                </a:solidFill>
+                <a:latin typeface="Courier New" pitchFamily="34" charset="0"/>
+                <a:ea typeface="Courier New" pitchFamily="34" charset="-122"/>
+                <a:cs typeface="Courier New" pitchFamily="34" charset="-120"/>
+              </a:rPr>
+              <a:t>Activate</a:t>
+            </a:r>
+            <a:r>
+              <a:rPr lang="en-US" sz="1050" dirty="0">
+                <a:solidFill>
+                  <a:srgbClr val="CCCCCC"/>
+                </a:solidFill>
+                <a:latin typeface="Courier New" pitchFamily="34" charset="0"/>
+                <a:ea typeface="Courier New" pitchFamily="34" charset="-122"/>
+                <a:cs typeface="Courier New" pitchFamily="34" charset="-120"/>
+              </a:rPr>
+              <a:t>,</a:t>
+            </a:r>
+            <a:r>
+              <a:rPr lang="en-US" sz="1050" dirty="0">
+                <a:solidFill>
+                  <a:srgbClr val="CCCCCC"/>
+                </a:solidFill>
+                <a:latin typeface="Courier New" pitchFamily="34" charset="0"/>
+                <a:ea typeface="Courier New" pitchFamily="34" charset="-122"/>
+                <a:cs typeface="Courier New" pitchFamily="34" charset="-120"/>
+              </a:rPr>
+              <a:t> </a:t>
+            </a:r>
+            <a:r>
+              <a:rPr lang="en-US" sz="1050" dirty="0">
+                <a:solidFill>
+                  <a:srgbClr val="CCCCCC"/>
+                </a:solidFill>
+                <a:latin typeface="Courier New" pitchFamily="34" charset="0"/>
+                <a:ea typeface="Courier New" pitchFamily="34" charset="-122"/>
+                <a:cs typeface="Courier New" pitchFamily="34" charset="-120"/>
+              </a:rPr>
+              <a:t>Discard</a:t>
+            </a:r>
+            <a:r>
+              <a:rPr lang="en-US" sz="1050" dirty="0">
+                <a:solidFill>
+                  <a:srgbClr val="CCCCCC"/>
+                </a:solidFill>
+                <a:latin typeface="Courier New" pitchFamily="34" charset="0"/>
+                <a:ea typeface="Courier New" pitchFamily="34" charset="-122"/>
+                <a:cs typeface="Courier New" pitchFamily="34" charset="-120"/>
+              </a:rPr>
+              <a:t>,</a:t>
+            </a:r>
+            <a:r>
+              <a:rPr lang="en-US" sz="1050" dirty="0">
+                <a:solidFill>
+                  <a:srgbClr val="CCCCCC"/>
+                </a:solidFill>
+                <a:latin typeface="Courier New" pitchFamily="34" charset="0"/>
+                <a:ea typeface="Courier New" pitchFamily="34" charset="-122"/>
+                <a:cs typeface="Courier New" pitchFamily="34" charset="-120"/>
+              </a:rPr>
+              <a:t> </a:t>
+            </a:r>
+            <a:r>
+              <a:rPr lang="en-US" sz="1050" dirty="0">
+                <a:solidFill>
+                  <a:srgbClr val="CCCCCC"/>
+                </a:solidFill>
+                <a:latin typeface="Courier New" pitchFamily="34" charset="0"/>
+                <a:ea typeface="Courier New" pitchFamily="34" charset="-122"/>
+                <a:cs typeface="Courier New" pitchFamily="34" charset="-120"/>
+              </a:rPr>
+              <a:t>Resume</a:t>
+            </a:r>
+            <a:r>
+              <a:rPr lang="en-US" sz="1050" dirty="0">
+                <a:solidFill>
+                  <a:srgbClr val="CCCCCC"/>
+                </a:solidFill>
+                <a:latin typeface="Courier New" pitchFamily="34" charset="0"/>
+                <a:ea typeface="Courier New" pitchFamily="34" charset="-122"/>
+                <a:cs typeface="Courier New" pitchFamily="34" charset="-120"/>
+              </a:rPr>
+              <a:t>,</a:t>
+            </a:r>
+            <a:r>
+              <a:rPr lang="en-US" sz="1050" dirty="0">
+                <a:solidFill>
+                  <a:srgbClr val="CCCCCC"/>
+                </a:solidFill>
+                <a:latin typeface="Courier New" pitchFamily="34" charset="0"/>
+                <a:ea typeface="Courier New" pitchFamily="34" charset="-122"/>
+                <a:cs typeface="Courier New" pitchFamily="34" charset="-120"/>
+              </a:rPr>
+              <a:t> </a:t>
+            </a:r>
+            <a:r>
+              <a:rPr lang="en-US" sz="1050" dirty="0">
+                <a:solidFill>
+                  <a:srgbClr val="CCCCCC"/>
+                </a:solidFill>
+                <a:latin typeface="Courier New" pitchFamily="34" charset="0"/>
+                <a:ea typeface="Courier New" pitchFamily="34" charset="-122"/>
+                <a:cs typeface="Courier New" pitchFamily="34" charset="-120"/>
+              </a:rPr>
+              <a:t>Prepare</a:t>
+            </a:r>
+            <a:endParaRPr lang="en-US" sz="1050" dirty="0"/>
+          </a:p>
+          <a:p>
+            <a:pPr indent="0" marL="0">
+              <a:lnSpc>
+                <a:spcPct val="105000"/>
+              </a:lnSpc>
+              <a:buNone/>
+            </a:pPr>
+            <a:r>
+              <a:rPr lang="en-US" sz="1050" dirty="0">
+                <a:solidFill>
+                  <a:srgbClr val="CCCCCC"/>
+                </a:solidFill>
+                <a:latin typeface="Courier New" pitchFamily="34" charset="0"/>
+                <a:ea typeface="Courier New" pitchFamily="34" charset="-122"/>
+                <a:cs typeface="Courier New" pitchFamily="34" charset="-120"/>
+              </a:rPr>
               <a:t>}</a:t>
             </a:r>
             <a:endParaRPr lang="en-US" sz="1050" dirty="0"/>
@@ -14146,7 +13808,7 @@
                   <a:srgbClr val="556B82"/>
                 </a:solidFill>
               </a:rPr>
-              <a:t>A ação </a:t>
+              <a:t>As ações são definidas e implementadas no BO </a:t>
             </a:r>
             <a:r>
               <a:rPr lang="en-US" sz="1200" dirty="0">
@@ -14157,7 +13819,7 @@
                 <a:ea typeface="Courier New" pitchFamily="34" charset="-122"/>
                 <a:cs typeface="Courier New" pitchFamily="34" charset="-120"/>
               </a:rPr>
-              <a:t>acceptTravel</a:t>
+              <a:t>ZR_PC_PEDIDO</a:t>
             </a:r>
             <a:r>
               <a:rPr lang="en-US" sz="1200" dirty="0">
@@ -14165,7 +13827,7 @@
                   <a:srgbClr val="556B82"/>
                 </a:solidFill>
               </a:rPr>
-              <a:t> é definida e implementada no BO; a projeção a expõe.</a:t>
+              <a:t>; a projeção as expõe.</a:t>
             </a:r>
             <a:endParaRPr lang="en-US" sz="1400" dirty="0"/>
           </a:p>
@@ -14287,7 +13949,7 @@
         <p:spPr>
           <a:xfrm>
             <a:off x="6324448" y="2084832"/>
-            <a:ext cx="2852928" cy="292608"/>
+            <a:ext cx="2619756" cy="292608"/>
           </a:xfrm>
           <a:prstGeom prst="rect">
             <a:avLst/>
@@ -14307,7 +13969,7 @@
         <p:spPr>
           <a:xfrm>
             <a:off x="6324448" y="2084832"/>
-            <a:ext cx="2852928" cy="27432"/>
+            <a:ext cx="2619756" cy="27432"/>
           </a:xfrm>
           <a:prstGeom prst="rect">
             <a:avLst/>
@@ -14327,7 +13989,7 @@
         <p:spPr>
           <a:xfrm>
             <a:off x="6415888" y="2103120"/>
-            <a:ext cx="2670048" cy="274320"/>
+            <a:ext cx="2436876" cy="274320"/>
           </a:xfrm>
           <a:prstGeom prst="rect">
             <a:avLst/>
@@ -14348,7 +14010,7 @@
                   <a:srgbClr val="FFFFFF"/>
                 </a:solidFill>
               </a:rPr>
-              <a:t>zc_fe_travel_######.ddlx.asddlxs</a:t>
+              <a:t>zc_pc_pedido_app.ddlx.asddlxs</a:t>
             </a:r>
             <a:endParaRPr lang="en-US" sz="950" dirty="0"/>
           </a:p>
@@ -14382,7 +14044,7 @@
               <a:buNone/>
             </a:pPr>
             <a:r>
-              <a:rPr lang="en-US" sz="1050" dirty="0">
+              <a:rPr lang="en-US" sz="850" dirty="0">
                 <a:solidFill>
                   <a:srgbClr val="6E7681"/>
                 </a:solidFill>
@@ -14392,7 +14054,7 @@
               </a:rPr>
               <a:t>1</a:t>
             </a:r>
-            <a:endParaRPr lang="en-US" sz="1050" dirty="0"/>
+            <a:endParaRPr lang="en-US" sz="850" dirty="0"/>
           </a:p>
           <a:p>
             <a:pPr algn="r" indent="0" marL="0">
@@ -14402,7 +14064,7 @@
               <a:buNone/>
             </a:pPr>
             <a:r>
-              <a:rPr lang="en-US" sz="1050" dirty="0">
+              <a:rPr lang="en-US" sz="850" dirty="0">
                 <a:solidFill>
                   <a:srgbClr val="6E7681"/>
                 </a:solidFill>
@@ -14412,7 +14074,7 @@
               </a:rPr>
               <a:t>2</a:t>
             </a:r>
-            <a:endParaRPr lang="en-US" sz="1050" dirty="0"/>
+            <a:endParaRPr lang="en-US" sz="850" dirty="0"/>
           </a:p>
           <a:p>
             <a:pPr algn="r" indent="0" marL="0">
@@ -14422,7 +14084,7 @@
               <a:buNone/>
             </a:pPr>
             <a:r>
-              <a:rPr lang="en-US" sz="1050" dirty="0">
+              <a:rPr lang="en-US" sz="850" dirty="0">
                 <a:solidFill>
                   <a:srgbClr val="6E7681"/>
                 </a:solidFill>
@@ -14432,7 +14094,7 @@
               </a:rPr>
               <a:t>3</a:t>
             </a:r>
-            <a:endParaRPr lang="en-US" sz="1050" dirty="0"/>
+            <a:endParaRPr lang="en-US" sz="850" dirty="0"/>
           </a:p>
           <a:p>
             <a:pPr algn="r" indent="0" marL="0">
@@ -14442,7 +14104,7 @@
               <a:buNone/>
             </a:pPr>
             <a:r>
-              <a:rPr lang="en-US" sz="1050" dirty="0">
+              <a:rPr lang="en-US" sz="850" dirty="0">
                 <a:solidFill>
                   <a:srgbClr val="6E7681"/>
                 </a:solidFill>
@@ -14452,7 +14114,7 @@
               </a:rPr>
               <a:t>4</a:t>
             </a:r>
-            <a:endParaRPr lang="en-US" sz="1050" dirty="0"/>
+            <a:endParaRPr lang="en-US" sz="850" dirty="0"/>
           </a:p>
           <a:p>
             <a:pPr algn="r" indent="0" marL="0">
@@ -14462,7 +14124,7 @@
               <a:buNone/>
             </a:pPr>
             <a:r>
-              <a:rPr lang="en-US" sz="1050" dirty="0">
+              <a:rPr lang="en-US" sz="850" dirty="0">
                 <a:solidFill>
                   <a:srgbClr val="6E7681"/>
                 </a:solidFill>
@@ -14472,7 +14134,7 @@
               </a:rPr>
               <a:t>5</a:t>
             </a:r>
-            <a:endParaRPr lang="en-US" sz="1050" dirty="0"/>
+            <a:endParaRPr lang="en-US" sz="850" dirty="0"/>
           </a:p>
           <a:p>
             <a:pPr algn="r" indent="0" marL="0">
@@ -14482,7 +14144,7 @@
               <a:buNone/>
             </a:pPr>
             <a:r>
-              <a:rPr lang="en-US" sz="1050" dirty="0">
+              <a:rPr lang="en-US" sz="850" dirty="0">
                 <a:solidFill>
                   <a:srgbClr val="6E7681"/>
                 </a:solidFill>
@@ -14492,7 +14154,7 @@
               </a:rPr>
               <a:t>6</a:t>
             </a:r>
-            <a:endParaRPr lang="en-US" sz="1050" dirty="0"/>
+            <a:endParaRPr lang="en-US" sz="850" dirty="0"/>
           </a:p>
           <a:p>
             <a:pPr algn="r" indent="0" marL="0">
@@ -14502,7 +14164,7 @@
               <a:buNone/>
             </a:pPr>
             <a:r>
-              <a:rPr lang="en-US" sz="1050" dirty="0">
+              <a:rPr lang="en-US" sz="850" dirty="0">
                 <a:solidFill>
                   <a:srgbClr val="6E7681"/>
                 </a:solidFill>
@@ -14512,7 +14174,67 @@
               </a:rPr>
               <a:t>7</a:t>
             </a:r>
-            <a:endParaRPr lang="en-US" sz="1050" dirty="0"/>
+            <a:endParaRPr lang="en-US" sz="850" dirty="0"/>
+          </a:p>
+          <a:p>
+            <a:pPr algn="r" indent="0" marL="0">
+              <a:lnSpc>
+                <a:spcPct val="105000"/>
+              </a:lnSpc>
+              <a:buNone/>
+            </a:pPr>
+            <a:r>
+              <a:rPr lang="en-US" sz="850" dirty="0">
+                <a:solidFill>
+                  <a:srgbClr val="6E7681"/>
+                </a:solidFill>
+                <a:latin typeface="Courier New" pitchFamily="34" charset="0"/>
+                <a:ea typeface="Courier New" pitchFamily="34" charset="-122"/>
+                <a:cs typeface="Courier New" pitchFamily="34" charset="-120"/>
+              </a:rPr>
+              <a:t>8</a:t>
+            </a:r>
+            <a:endParaRPr lang="en-US" sz="850" dirty="0"/>
+          </a:p>
+          <a:p>
+            <a:pPr algn="r" indent="0" marL="0">
+              <a:lnSpc>
+                <a:spcPct val="105000"/>
+              </a:lnSpc>
+              <a:buNone/>
+            </a:pPr>
+            <a:r>
+              <a:rPr lang="en-US" sz="850" dirty="0">
+                <a:solidFill>
+                  <a:srgbClr val="6E7681"/>
+                </a:solidFill>
+                <a:latin typeface="Courier New" pitchFamily="34" charset="0"/>
+                <a:ea typeface="Courier New" pitchFamily="34" charset="-122"/>
+                <a:cs typeface="Courier New" pitchFamily="34" charset="-120"/>
+              </a:rPr>
+              <a:t>9</a:t>
+            </a:r>
+            <a:endParaRPr lang="en-US" sz="850" dirty="0"/>
+          </a:p>
+          <a:p>
+            <a:pPr algn="r" indent="0" marL="0">
+              <a:lnSpc>
+                <a:spcPct val="105000"/>
+              </a:lnSpc>
+              <a:buNone/>
+            </a:pPr>
+            <a:r>
+              <a:rPr lang="en-US" sz="850" dirty="0">
+                <a:solidFill>
+                  <a:srgbClr val="6E7681"/>
+                </a:solidFill>
+                <a:latin typeface="Courier New" pitchFamily="34" charset="0"/>
+                <a:ea typeface="Courier New" pitchFamily="34" charset="-122"/>
+                <a:cs typeface="Courier New" pitchFamily="34" charset="-120"/>
+              </a:rPr>
+              <a:t>10</a:t>
+            </a:r>
+            <a:endParaRPr lang="en-US" sz="850" dirty="0"/>
           </a:p>
         </p:txBody>
       </p:sp>
@@ -14544,7 +14266,7 @@
               <a:buNone/>
             </a:pPr>
             <a:r>
-              <a:rPr lang="en-US" sz="1050" dirty="0">
+              <a:rPr lang="en-US" sz="850" dirty="0">
                 <a:solidFill>
                   <a:srgbClr val="CCCCCC"/>
                 </a:solidFill>
@@ -14555,7 +14277,7 @@
               <a:t>@</a:t>
             </a:r>
             <a:r>
-              <a:rPr lang="en-US" sz="1050" dirty="0">
+              <a:rPr lang="en-US" sz="850" dirty="0">
                 <a:solidFill>
                   <a:srgbClr val="CCCCCC"/>
                 </a:solidFill>
@@ -14566,7 +14288,7 @@
               <a:t>UI</a:t>
             </a:r>
             <a:r>
-              <a:rPr lang="en-US" sz="1050" dirty="0">
+              <a:rPr lang="en-US" sz="850" dirty="0">
                 <a:solidFill>
                   <a:srgbClr val="CCCCCC"/>
                 </a:solidFill>
@@ -14577,7 +14299,7 @@
               <a:t>.</a:t>
             </a:r>
             <a:r>
-              <a:rPr lang="en-US" sz="1050" dirty="0">
+              <a:rPr lang="en-US" sz="850" dirty="0">
                 <a:solidFill>
                   <a:srgbClr val="CCCCCC"/>
                 </a:solidFill>
@@ -14588,7 +14310,7 @@
               <a:t>lineItem</a:t>
             </a:r>
             <a:r>
-              <a:rPr lang="en-US" sz="1050" dirty="0">
+              <a:rPr lang="en-US" sz="850" dirty="0">
                 <a:solidFill>
                   <a:srgbClr val="CCCCCC"/>
                 </a:solidFill>
@@ -14599,7 +14321,7 @@
               <a:t>:</a:t>
             </a:r>
             <a:r>
-              <a:rPr lang="en-US" sz="1050" dirty="0">
+              <a:rPr lang="en-US" sz="850" dirty="0">
                 <a:solidFill>
                   <a:srgbClr val="CCCCCC"/>
                 </a:solidFill>
@@ -14610,7 +14332,7 @@
               <a:t> </a:t>
             </a:r>
             <a:r>
-              <a:rPr lang="en-US" sz="1050" dirty="0">
+              <a:rPr lang="en-US" sz="850" dirty="0">
                 <a:solidFill>
                   <a:srgbClr val="CCCCCC"/>
                 </a:solidFill>
@@ -14620,7 +14342,7 @@
               </a:rPr>
               <a:t>[</a:t>
             </a:r>
-            <a:endParaRPr lang="en-US" sz="1050" dirty="0"/>
+            <a:endParaRPr lang="en-US" sz="850" dirty="0"/>
           </a:p>
           <a:p>
             <a:pPr indent="0" marL="0">
@@ -14630,7 +14352,7 @@
               <a:buNone/>
             </a:pPr>
             <a:r>
-              <a:rPr lang="en-US" sz="1050" dirty="0">
+              <a:rPr lang="en-US" sz="850" dirty="0">
                 <a:solidFill>
                   <a:srgbClr val="CCCCCC"/>
                 </a:solidFill>
@@ -14641,7 +14363,7 @@
               <a:t>  </a:t>
             </a:r>
             <a:r>
-              <a:rPr lang="en-US" sz="1050" dirty="0">
+              <a:rPr lang="en-US" sz="850" dirty="0">
                 <a:solidFill>
                   <a:srgbClr val="CCCCCC"/>
                 </a:solidFill>
@@ -14652,7 +14374,7 @@
               <a:t>{</a:t>
             </a:r>
             <a:r>
-              <a:rPr lang="en-US" sz="1050" dirty="0">
+              <a:rPr lang="en-US" sz="850" dirty="0">
                 <a:solidFill>
                   <a:srgbClr val="CCCCCC"/>
                 </a:solidFill>
@@ -14663,7 +14385,7 @@
               <a:t> </a:t>
             </a:r>
             <a:r>
-              <a:rPr lang="en-US" sz="1050" dirty="0">
+              <a:rPr lang="en-US" sz="850" dirty="0">
                 <a:solidFill>
                   <a:srgbClr val="CCCCCC"/>
                 </a:solidFill>
@@ -14674,7 +14396,7 @@
               <a:t>position</a:t>
             </a:r>
             <a:r>
-              <a:rPr lang="en-US" sz="1050" dirty="0">
+              <a:rPr lang="en-US" sz="850" dirty="0">
                 <a:solidFill>
                   <a:srgbClr val="CCCCCC"/>
                 </a:solidFill>
@@ -14685,7 +14407,7 @@
               <a:t>:</a:t>
             </a:r>
             <a:r>
-              <a:rPr lang="en-US" sz="1050" dirty="0">
+              <a:rPr lang="en-US" sz="850" dirty="0">
                 <a:solidFill>
                   <a:srgbClr val="CCCCCC"/>
                 </a:solidFill>
@@ -14696,7 +14418,7 @@
               <a:t> </a:t>
             </a:r>
             <a:r>
-              <a:rPr lang="en-US" sz="1050" dirty="0">
+              <a:rPr lang="en-US" sz="850" dirty="0">
                 <a:solidFill>
                   <a:srgbClr val="B5CEA8"/>
                 </a:solidFill>
@@ -14707,7 +14429,7 @@
               <a:t>10</a:t>
             </a:r>
             <a:r>
-              <a:rPr lang="en-US" sz="1050" dirty="0">
+              <a:rPr lang="en-US" sz="850" dirty="0">
                 <a:solidFill>
                   <a:srgbClr val="CCCCCC"/>
                 </a:solidFill>
@@ -14718,7 +14440,7 @@
               <a:t>,</a:t>
             </a:r>
             <a:r>
-              <a:rPr lang="en-US" sz="1050" dirty="0">
+              <a:rPr lang="en-US" sz="850" dirty="0">
                 <a:solidFill>
                   <a:srgbClr val="CCCCCC"/>
                 </a:solidFill>
@@ -14729,7 +14451,73 @@
               <a:t> </a:t>
             </a:r>
             <a:r>
-              <a:rPr lang="en-US" sz="1050" dirty="0">
+              <a:rPr lang="en-US" sz="850" dirty="0">
+                <a:solidFill>
+                  <a:srgbClr val="CCCCCC"/>
+                </a:solidFill>
+                <a:latin typeface="Courier New" pitchFamily="34" charset="0"/>
+                <a:ea typeface="Courier New" pitchFamily="34" charset="-122"/>
+                <a:cs typeface="Courier New" pitchFamily="34" charset="-120"/>
+              </a:rPr>
+              <a:t>label</a:t>
+            </a:r>
+            <a:r>
+              <a:rPr lang="en-US" sz="850" dirty="0">
+                <a:solidFill>
+                  <a:srgbClr val="CCCCCC"/>
+                </a:solidFill>
+                <a:latin typeface="Courier New" pitchFamily="34" charset="0"/>
+                <a:ea typeface="Courier New" pitchFamily="34" charset="-122"/>
+                <a:cs typeface="Courier New" pitchFamily="34" charset="-120"/>
+              </a:rPr>
+              <a:t>:</a:t>
+            </a:r>
+            <a:r>
+              <a:rPr lang="en-US" sz="850" dirty="0">
+                <a:solidFill>
+                  <a:srgbClr val="CCCCCC"/>
+                </a:solidFill>
+                <a:latin typeface="Courier New" pitchFamily="34" charset="0"/>
+                <a:ea typeface="Courier New" pitchFamily="34" charset="-122"/>
+                <a:cs typeface="Courier New" pitchFamily="34" charset="-120"/>
+              </a:rPr>
+              <a:t> </a:t>
+            </a:r>
+            <a:r>
+              <a:rPr lang="en-US" sz="850" dirty="0">
+                <a:solidFill>
+                  <a:srgbClr val="CE9178"/>
+                </a:solidFill>
+                <a:latin typeface="Courier New" pitchFamily="34" charset="0"/>
+                <a:ea typeface="Courier New" pitchFamily="34" charset="-122"/>
+                <a:cs typeface="Courier New" pitchFamily="34" charset="-120"/>
+              </a:rPr>
+              <a:t>'Pedido'</a:t>
+            </a:r>
+            <a:r>
+              <a:rPr lang="en-US" sz="850" dirty="0">
+                <a:solidFill>
+                  <a:srgbClr val="CCCCCC"/>
+                </a:solidFill>
+                <a:latin typeface="Courier New" pitchFamily="34" charset="0"/>
+                <a:ea typeface="Courier New" pitchFamily="34" charset="-122"/>
+                <a:cs typeface="Courier New" pitchFamily="34" charset="-120"/>
+              </a:rPr>
+              <a:t>,</a:t>
+            </a:r>
+            <a:r>
+              <a:rPr lang="en-US" sz="850" dirty="0">
+                <a:solidFill>
+                  <a:srgbClr val="CCCCCC"/>
+                </a:solidFill>
+                <a:latin typeface="Courier New" pitchFamily="34" charset="0"/>
+                <a:ea typeface="Courier New" pitchFamily="34" charset="-122"/>
+                <a:cs typeface="Courier New" pitchFamily="34" charset="-120"/>
+              </a:rPr>
+              <a:t> </a:t>
+            </a:r>
+            <a:r>
+              <a:rPr lang="en-US" sz="850" dirty="0">
                 <a:solidFill>
                   <a:srgbClr val="CCCCCC"/>
                 </a:solidFill>
@@ -14740,7 +14528,7 @@
               <a:t>importance</a:t>
             </a:r>
             <a:r>
-              <a:rPr lang="en-US" sz="1050" dirty="0">
+              <a:rPr lang="en-US" sz="850" dirty="0">
                 <a:solidFill>
                   <a:srgbClr val="CCCCCC"/>
                 </a:solidFill>
@@ -14751,7 +14539,7 @@
               <a:t>:</a:t>
             </a:r>
             <a:r>
-              <a:rPr lang="en-US" sz="1050" dirty="0">
+              <a:rPr lang="en-US" sz="850" dirty="0">
                 <a:solidFill>
                   <a:srgbClr val="CCCCCC"/>
                 </a:solidFill>
@@ -14762,7 +14550,7 @@
               <a:t> </a:t>
             </a:r>
             <a:r>
-              <a:rPr lang="en-US" sz="1050" dirty="0">
+              <a:rPr lang="en-US" sz="850" dirty="0">
                 <a:solidFill>
                   <a:srgbClr val="CCCCCC"/>
                 </a:solidFill>
@@ -14773,7 +14561,7 @@
               <a:t>#</a:t>
             </a:r>
             <a:r>
-              <a:rPr lang="en-US" sz="1050" dirty="0">
+              <a:rPr lang="en-US" sz="850" dirty="0">
                 <a:solidFill>
                   <a:srgbClr val="CCCCCC"/>
                 </a:solidFill>
@@ -14784,7 +14572,7 @@
               <a:t>HIGH</a:t>
             </a:r>
             <a:r>
-              <a:rPr lang="en-US" sz="1050" dirty="0">
+              <a:rPr lang="en-US" sz="850" dirty="0">
                 <a:solidFill>
                   <a:srgbClr val="CCCCCC"/>
                 </a:solidFill>
@@ -14795,7 +14583,7 @@
               <a:t> </a:t>
             </a:r>
             <a:r>
-              <a:rPr lang="en-US" sz="1050" dirty="0">
+              <a:rPr lang="en-US" sz="850" dirty="0">
                 <a:solidFill>
                   <a:srgbClr val="CCCCCC"/>
                 </a:solidFill>
@@ -14806,7 +14594,7 @@
               <a:t>}</a:t>
             </a:r>
             <a:r>
-              <a:rPr lang="en-US" sz="1050" dirty="0">
+              <a:rPr lang="en-US" sz="850" dirty="0">
                 <a:solidFill>
                   <a:srgbClr val="CCCCCC"/>
                 </a:solidFill>
@@ -14816,7 +14604,7 @@
               </a:rPr>
               <a:t>,</a:t>
             </a:r>
-            <a:endParaRPr lang="en-US" sz="1050" dirty="0"/>
+            <a:endParaRPr lang="en-US" sz="850" dirty="0"/>
           </a:p>
           <a:p>
             <a:pPr indent="0" marL="0">
@@ -14826,7 +14614,7 @@
               <a:buNone/>
             </a:pPr>
             <a:r>
-              <a:rPr lang="en-US" sz="1050" dirty="0">
+              <a:rPr lang="en-US" sz="850" dirty="0">
                 <a:solidFill>
                   <a:srgbClr val="CCCCCC"/>
                 </a:solidFill>
@@ -14837,7 +14625,7 @@
               <a:t>  </a:t>
             </a:r>
             <a:r>
-              <a:rPr lang="en-US" sz="1050" dirty="0">
+              <a:rPr lang="en-US" sz="850" dirty="0">
                 <a:solidFill>
                   <a:srgbClr val="CCCCCC"/>
                 </a:solidFill>
@@ -14848,7 +14636,7 @@
               <a:t>{</a:t>
             </a:r>
             <a:r>
-              <a:rPr lang="en-US" sz="1050" dirty="0">
+              <a:rPr lang="en-US" sz="850" dirty="0">
                 <a:solidFill>
                   <a:srgbClr val="CCCCCC"/>
                 </a:solidFill>
@@ -14859,7 +14647,7 @@
               <a:t> </a:t>
             </a:r>
             <a:r>
-              <a:rPr lang="en-US" sz="1050" dirty="0">
+              <a:rPr lang="en-US" sz="850" dirty="0">
                 <a:solidFill>
                   <a:srgbClr val="CCCCCC"/>
                 </a:solidFill>
@@ -14870,7 +14658,7 @@
               <a:t>type</a:t>
             </a:r>
             <a:r>
-              <a:rPr lang="en-US" sz="1050" dirty="0">
+              <a:rPr lang="en-US" sz="850" dirty="0">
                 <a:solidFill>
                   <a:srgbClr val="CCCCCC"/>
                 </a:solidFill>
@@ -14881,7 +14669,7 @@
               <a:t>:</a:t>
             </a:r>
             <a:r>
-              <a:rPr lang="en-US" sz="1050" dirty="0">
+              <a:rPr lang="en-US" sz="850" dirty="0">
                 <a:solidFill>
                   <a:srgbClr val="CCCCCC"/>
                 </a:solidFill>
@@ -14892,7 +14680,7 @@
               <a:t> </a:t>
             </a:r>
             <a:r>
-              <a:rPr lang="en-US" sz="1050" dirty="0">
+              <a:rPr lang="en-US" sz="850" dirty="0">
                 <a:solidFill>
                   <a:srgbClr val="CCCCCC"/>
                 </a:solidFill>
@@ -14903,18 +14691,18 @@
               <a:t>#</a:t>
             </a:r>
             <a:r>
-              <a:rPr lang="en-US" sz="1050" dirty="0">
-                <a:solidFill>
-                  <a:srgbClr val="CCCCCC"/>
-                </a:solidFill>
-                <a:latin typeface="Courier New" pitchFamily="34" charset="0"/>
-                <a:ea typeface="Courier New" pitchFamily="34" charset="-122"/>
-                <a:cs typeface="Courier New" pitchFamily="34" charset="-120"/>
-              </a:rPr>
-              <a:t>FOR_ACTION</a:t>
-            </a:r>
-            <a:r>
-              <a:rPr lang="en-US" sz="1050" dirty="0">
+              <a:rPr lang="en-US" sz="850" dirty="0">
+                <a:solidFill>
+                  <a:srgbClr val="CCCCCC"/>
+                </a:solidFill>
+                <a:latin typeface="Courier New" pitchFamily="34" charset="0"/>
+                <a:ea typeface="Courier New" pitchFamily="34" charset="-122"/>
+                <a:cs typeface="Courier New" pitchFamily="34" charset="-120"/>
+              </a:rPr>
+              <a:t>FOR_ACTION_GROUP</a:t>
+            </a:r>
+            <a:r>
+              <a:rPr lang="en-US" sz="850" dirty="0">
                 <a:solidFill>
                   <a:srgbClr val="CCCCCC"/>
                 </a:solidFill>
@@ -14924,7 +14712,73 @@
               </a:rPr>
               <a:t>,</a:t>
             </a:r>
-            <a:endParaRPr lang="en-US" sz="1050" dirty="0"/>
+            <a:r>
+              <a:rPr lang="en-US" sz="850" dirty="0">
+                <a:solidFill>
+                  <a:srgbClr val="CCCCCC"/>
+                </a:solidFill>
+                <a:latin typeface="Courier New" pitchFamily="34" charset="0"/>
+                <a:ea typeface="Courier New" pitchFamily="34" charset="-122"/>
+                <a:cs typeface="Courier New" pitchFamily="34" charset="-120"/>
+              </a:rPr>
+              <a:t> </a:t>
+            </a:r>
+            <a:r>
+              <a:rPr lang="en-US" sz="850" dirty="0">
+                <a:solidFill>
+                  <a:srgbClr val="CCCCCC"/>
+                </a:solidFill>
+                <a:latin typeface="Courier New" pitchFamily="34" charset="0"/>
+                <a:ea typeface="Courier New" pitchFamily="34" charset="-122"/>
+                <a:cs typeface="Courier New" pitchFamily="34" charset="-120"/>
+              </a:rPr>
+              <a:t>actionGroupId</a:t>
+            </a:r>
+            <a:r>
+              <a:rPr lang="en-US" sz="850" dirty="0">
+                <a:solidFill>
+                  <a:srgbClr val="CCCCCC"/>
+                </a:solidFill>
+                <a:latin typeface="Courier New" pitchFamily="34" charset="0"/>
+                <a:ea typeface="Courier New" pitchFamily="34" charset="-122"/>
+                <a:cs typeface="Courier New" pitchFamily="34" charset="-120"/>
+              </a:rPr>
+              <a:t>:</a:t>
+            </a:r>
+            <a:r>
+              <a:rPr lang="en-US" sz="850" dirty="0">
+                <a:solidFill>
+                  <a:srgbClr val="CCCCCC"/>
+                </a:solidFill>
+                <a:latin typeface="Courier New" pitchFamily="34" charset="0"/>
+                <a:ea typeface="Courier New" pitchFamily="34" charset="-122"/>
+                <a:cs typeface="Courier New" pitchFamily="34" charset="-120"/>
+              </a:rPr>
+              <a:t> </a:t>
+            </a:r>
+            <a:r>
+              <a:rPr lang="en-US" sz="850" dirty="0">
+                <a:solidFill>
+                  <a:srgbClr val="CE9178"/>
+                </a:solidFill>
+                <a:latin typeface="Courier New" pitchFamily="34" charset="0"/>
+                <a:ea typeface="Courier New" pitchFamily="34" charset="-122"/>
+                <a:cs typeface="Courier New" pitchFamily="34" charset="-120"/>
+              </a:rPr>
+              <a:t>'AcoesPedido'</a:t>
+            </a:r>
+            <a:r>
+              <a:rPr lang="en-US" sz="850" dirty="0">
+                <a:solidFill>
+                  <a:srgbClr val="CCCCCC"/>
+                </a:solidFill>
+                <a:latin typeface="Courier New" pitchFamily="34" charset="0"/>
+                <a:ea typeface="Courier New" pitchFamily="34" charset="-122"/>
+                <a:cs typeface="Courier New" pitchFamily="34" charset="-120"/>
+              </a:rPr>
+              <a:t>,</a:t>
+            </a:r>
+            <a:endParaRPr lang="en-US" sz="850" dirty="0"/>
           </a:p>
           <a:p>
             <a:pPr indent="0" marL="0">
@@ -14934,7 +14788,7 @@
               <a:buNone/>
             </a:pPr>
             <a:r>
-              <a:rPr lang="en-US" sz="1050" dirty="0">
+              <a:rPr lang="en-US" sz="850" dirty="0">
                 <a:solidFill>
                   <a:srgbClr val="CCCCCC"/>
                 </a:solidFill>
@@ -14945,18 +14799,18 @@
               <a:t>    </a:t>
             </a:r>
             <a:r>
-              <a:rPr lang="en-US" sz="1050" dirty="0">
-                <a:solidFill>
-                  <a:srgbClr val="CCCCCC"/>
-                </a:solidFill>
-                <a:latin typeface="Courier New" pitchFamily="34" charset="0"/>
-                <a:ea typeface="Courier New" pitchFamily="34" charset="-122"/>
-                <a:cs typeface="Courier New" pitchFamily="34" charset="-120"/>
-              </a:rPr>
-              <a:t>dataAction</a:t>
-            </a:r>
-            <a:r>
-              <a:rPr lang="en-US" sz="1050" dirty="0">
+              <a:rPr lang="en-US" sz="850" dirty="0">
+                <a:solidFill>
+                  <a:srgbClr val="CCCCCC"/>
+                </a:solidFill>
+                <a:latin typeface="Courier New" pitchFamily="34" charset="0"/>
+                <a:ea typeface="Courier New" pitchFamily="34" charset="-122"/>
+                <a:cs typeface="Courier New" pitchFamily="34" charset="-120"/>
+              </a:rPr>
+              <a:t>label</a:t>
+            </a:r>
+            <a:r>
+              <a:rPr lang="en-US" sz="850" dirty="0">
                 <a:solidFill>
                   <a:srgbClr val="CCCCCC"/>
                 </a:solidFill>
@@ -14967,7 +14821,7 @@
               <a:t>:</a:t>
             </a:r>
             <a:r>
-              <a:rPr lang="en-US" sz="1050" dirty="0">
+              <a:rPr lang="en-US" sz="850" dirty="0">
                 <a:solidFill>
                   <a:srgbClr val="CCCCCC"/>
                 </a:solidFill>
@@ -14978,7 +14832,7 @@
               <a:t> </a:t>
             </a:r>
             <a:r>
-              <a:rPr lang="en-US" sz="1050" dirty="0">
+              <a:rPr lang="en-US" sz="850" dirty="0">
                 <a:solidFill>
                   <a:srgbClr val="CE9178"/>
                 </a:solidFill>
@@ -14986,10 +14840,10 @@
                 <a:ea typeface="Courier New" pitchFamily="34" charset="-122"/>
                 <a:cs typeface="Courier New" pitchFamily="34" charset="-120"/>
               </a:rPr>
-              <a:t>'acceptTravel'</a:t>
-            </a:r>
-            <a:r>
-              <a:rPr lang="en-US" sz="1050" dirty="0">
+              <a:t>'Ações'</a:t>
+            </a:r>
+            <a:r>
+              <a:rPr lang="en-US" sz="850" dirty="0">
                 <a:solidFill>
                   <a:srgbClr val="CCCCCC"/>
                 </a:solidFill>
@@ -14999,7 +14853,95 @@
               </a:rPr>
               <a:t>,</a:t>
             </a:r>
-            <a:endParaRPr lang="en-US" sz="1050" dirty="0"/>
+            <a:r>
+              <a:rPr lang="en-US" sz="850" dirty="0">
+                <a:solidFill>
+                  <a:srgbClr val="CCCCCC"/>
+                </a:solidFill>
+                <a:latin typeface="Courier New" pitchFamily="34" charset="0"/>
+                <a:ea typeface="Courier New" pitchFamily="34" charset="-122"/>
+                <a:cs typeface="Courier New" pitchFamily="34" charset="-120"/>
+              </a:rPr>
+              <a:t> </a:t>
+            </a:r>
+            <a:r>
+              <a:rPr lang="en-US" sz="850" dirty="0">
+                <a:solidFill>
+                  <a:srgbClr val="CCCCCC"/>
+                </a:solidFill>
+                <a:latin typeface="Courier New" pitchFamily="34" charset="0"/>
+                <a:ea typeface="Courier New" pitchFamily="34" charset="-122"/>
+                <a:cs typeface="Courier New" pitchFamily="34" charset="-120"/>
+              </a:rPr>
+              <a:t>position</a:t>
+            </a:r>
+            <a:r>
+              <a:rPr lang="en-US" sz="850" dirty="0">
+                <a:solidFill>
+                  <a:srgbClr val="CCCCCC"/>
+                </a:solidFill>
+                <a:latin typeface="Courier New" pitchFamily="34" charset="0"/>
+                <a:ea typeface="Courier New" pitchFamily="34" charset="-122"/>
+                <a:cs typeface="Courier New" pitchFamily="34" charset="-120"/>
+              </a:rPr>
+              <a:t>:</a:t>
+            </a:r>
+            <a:r>
+              <a:rPr lang="en-US" sz="850" dirty="0">
+                <a:solidFill>
+                  <a:srgbClr val="CCCCCC"/>
+                </a:solidFill>
+                <a:latin typeface="Courier New" pitchFamily="34" charset="0"/>
+                <a:ea typeface="Courier New" pitchFamily="34" charset="-122"/>
+                <a:cs typeface="Courier New" pitchFamily="34" charset="-120"/>
+              </a:rPr>
+              <a:t> </a:t>
+            </a:r>
+            <a:r>
+              <a:rPr lang="en-US" sz="850" dirty="0">
+                <a:solidFill>
+                  <a:srgbClr val="B5CEA8"/>
+                </a:solidFill>
+                <a:latin typeface="Courier New" pitchFamily="34" charset="0"/>
+                <a:ea typeface="Courier New" pitchFamily="34" charset="-122"/>
+                <a:cs typeface="Courier New" pitchFamily="34" charset="-120"/>
+              </a:rPr>
+              <a:t>100</a:t>
+            </a:r>
+            <a:r>
+              <a:rPr lang="en-US" sz="850" dirty="0">
+                <a:solidFill>
+                  <a:srgbClr val="CCCCCC"/>
+                </a:solidFill>
+                <a:latin typeface="Courier New" pitchFamily="34" charset="0"/>
+                <a:ea typeface="Courier New" pitchFamily="34" charset="-122"/>
+                <a:cs typeface="Courier New" pitchFamily="34" charset="-120"/>
+              </a:rPr>
+              <a:t> </a:t>
+            </a:r>
+            <a:r>
+              <a:rPr lang="en-US" sz="850" dirty="0">
+                <a:solidFill>
+                  <a:srgbClr val="CCCCCC"/>
+                </a:solidFill>
+                <a:latin typeface="Courier New" pitchFamily="34" charset="0"/>
+                <a:ea typeface="Courier New" pitchFamily="34" charset="-122"/>
+                <a:cs typeface="Courier New" pitchFamily="34" charset="-120"/>
+              </a:rPr>
+              <a:t>}</a:t>
+            </a:r>
+            <a:r>
+              <a:rPr lang="en-US" sz="850" dirty="0">
+                <a:solidFill>
+                  <a:srgbClr val="CCCCCC"/>
+                </a:solidFill>
+                <a:latin typeface="Courier New" pitchFamily="34" charset="0"/>
+                <a:ea typeface="Courier New" pitchFamily="34" charset="-122"/>
+                <a:cs typeface="Courier New" pitchFamily="34" charset="-120"/>
+              </a:rPr>
+              <a:t>,</a:t>
+            </a:r>
+            <a:endParaRPr lang="en-US" sz="850" dirty="0"/>
           </a:p>
           <a:p>
             <a:pPr indent="0" marL="0">
@@ -15009,29 +14951,51 @@
               <a:buNone/>
             </a:pPr>
             <a:r>
-              <a:rPr lang="en-US" sz="1050" dirty="0">
-                <a:solidFill>
-                  <a:srgbClr val="CCCCCC"/>
-                </a:solidFill>
-                <a:latin typeface="Courier New" pitchFamily="34" charset="0"/>
-                <a:ea typeface="Courier New" pitchFamily="34" charset="-122"/>
-                <a:cs typeface="Courier New" pitchFamily="34" charset="-120"/>
-              </a:rPr>
-              <a:t>    </a:t>
-            </a:r>
-            <a:r>
-              <a:rPr lang="en-US" sz="1050" dirty="0">
-                <a:solidFill>
-                  <a:srgbClr val="CCCCCC"/>
-                </a:solidFill>
-                <a:latin typeface="Courier New" pitchFamily="34" charset="0"/>
-                <a:ea typeface="Courier New" pitchFamily="34" charset="-122"/>
-                <a:cs typeface="Courier New" pitchFamily="34" charset="-120"/>
-              </a:rPr>
-              <a:t>label</a:t>
-            </a:r>
-            <a:r>
-              <a:rPr lang="en-US" sz="1050" dirty="0">
+              <a:rPr lang="en-US" sz="850" dirty="0">
+                <a:solidFill>
+                  <a:srgbClr val="CCCCCC"/>
+                </a:solidFill>
+                <a:latin typeface="Courier New" pitchFamily="34" charset="0"/>
+                <a:ea typeface="Courier New" pitchFamily="34" charset="-122"/>
+                <a:cs typeface="Courier New" pitchFamily="34" charset="-120"/>
+              </a:rPr>
+              <a:t>  </a:t>
+            </a:r>
+            <a:r>
+              <a:rPr lang="en-US" sz="850" dirty="0">
+                <a:solidFill>
+                  <a:srgbClr val="CCCCCC"/>
+                </a:solidFill>
+                <a:latin typeface="Courier New" pitchFamily="34" charset="0"/>
+                <a:ea typeface="Courier New" pitchFamily="34" charset="-122"/>
+                <a:cs typeface="Courier New" pitchFamily="34" charset="-120"/>
+              </a:rPr>
+              <a:t>{</a:t>
+            </a:r>
+            <a:r>
+              <a:rPr lang="en-US" sz="850" dirty="0">
+                <a:solidFill>
+                  <a:srgbClr val="CCCCCC"/>
+                </a:solidFill>
+                <a:latin typeface="Courier New" pitchFamily="34" charset="0"/>
+                <a:ea typeface="Courier New" pitchFamily="34" charset="-122"/>
+                <a:cs typeface="Courier New" pitchFamily="34" charset="-120"/>
+              </a:rPr>
+              <a:t> </a:t>
+            </a:r>
+            <a:r>
+              <a:rPr lang="en-US" sz="850" dirty="0">
+                <a:solidFill>
+                  <a:srgbClr val="CCCCCC"/>
+                </a:solidFill>
+                <a:latin typeface="Courier New" pitchFamily="34" charset="0"/>
+                <a:ea typeface="Courier New" pitchFamily="34" charset="-122"/>
+                <a:cs typeface="Courier New" pitchFamily="34" charset="-120"/>
+              </a:rPr>
+              <a:t>type</a:t>
+            </a:r>
+            <a:r>
+              <a:rPr lang="en-US" sz="850" dirty="0">
                 <a:solidFill>
                   <a:srgbClr val="CCCCCC"/>
                 </a:solidFill>
@@ -15042,7 +15006,7 @@
               <a:t>:</a:t>
             </a:r>
             <a:r>
-              <a:rPr lang="en-US" sz="1050" dirty="0">
+              <a:rPr lang="en-US" sz="850" dirty="0">
                 <a:solidFill>
                   <a:srgbClr val="CCCCCC"/>
                 </a:solidFill>
@@ -15053,7 +15017,84 @@
               <a:t> </a:t>
             </a:r>
             <a:r>
-              <a:rPr lang="en-US" sz="1050" dirty="0">
+              <a:rPr lang="en-US" sz="850" dirty="0">
+                <a:solidFill>
+                  <a:srgbClr val="CCCCCC"/>
+                </a:solidFill>
+                <a:latin typeface="Courier New" pitchFamily="34" charset="0"/>
+                <a:ea typeface="Courier New" pitchFamily="34" charset="-122"/>
+                <a:cs typeface="Courier New" pitchFamily="34" charset="-120"/>
+              </a:rPr>
+              <a:t>#</a:t>
+            </a:r>
+            <a:r>
+              <a:rPr lang="en-US" sz="850" dirty="0">
+                <a:solidFill>
+                  <a:srgbClr val="CCCCCC"/>
+                </a:solidFill>
+                <a:latin typeface="Courier New" pitchFamily="34" charset="0"/>
+                <a:ea typeface="Courier New" pitchFamily="34" charset="-122"/>
+                <a:cs typeface="Courier New" pitchFamily="34" charset="-120"/>
+              </a:rPr>
+              <a:t>FOR_ACTION</a:t>
+            </a:r>
+            <a:r>
+              <a:rPr lang="en-US" sz="850" dirty="0">
+                <a:solidFill>
+                  <a:srgbClr val="CCCCCC"/>
+                </a:solidFill>
+                <a:latin typeface="Courier New" pitchFamily="34" charset="0"/>
+                <a:ea typeface="Courier New" pitchFamily="34" charset="-122"/>
+                <a:cs typeface="Courier New" pitchFamily="34" charset="-120"/>
+              </a:rPr>
+              <a:t>,</a:t>
+            </a:r>
+            <a:r>
+              <a:rPr lang="en-US" sz="850" dirty="0">
+                <a:solidFill>
+                  <a:srgbClr val="CCCCCC"/>
+                </a:solidFill>
+                <a:latin typeface="Courier New" pitchFamily="34" charset="0"/>
+                <a:ea typeface="Courier New" pitchFamily="34" charset="-122"/>
+                <a:cs typeface="Courier New" pitchFamily="34" charset="-120"/>
+              </a:rPr>
+              <a:t> </a:t>
+            </a:r>
+            <a:r>
+              <a:rPr lang="en-US" sz="850" dirty="0">
+                <a:solidFill>
+                  <a:srgbClr val="CCCCCC"/>
+                </a:solidFill>
+                <a:latin typeface="Courier New" pitchFamily="34" charset="0"/>
+                <a:ea typeface="Courier New" pitchFamily="34" charset="-122"/>
+                <a:cs typeface="Courier New" pitchFamily="34" charset="-120"/>
+              </a:rPr>
+              <a:t>dataAction</a:t>
+            </a:r>
+            <a:r>
+              <a:rPr lang="en-US" sz="850" dirty="0">
+                <a:solidFill>
+                  <a:srgbClr val="CCCCCC"/>
+                </a:solidFill>
+                <a:latin typeface="Courier New" pitchFamily="34" charset="0"/>
+                <a:ea typeface="Courier New" pitchFamily="34" charset="-122"/>
+                <a:cs typeface="Courier New" pitchFamily="34" charset="-120"/>
+              </a:rPr>
+              <a:t>:</a:t>
+            </a:r>
+            <a:r>
+              <a:rPr lang="en-US" sz="850" dirty="0">
+                <a:solidFill>
+                  <a:srgbClr val="CCCCCC"/>
+                </a:solidFill>
+                <a:latin typeface="Courier New" pitchFamily="34" charset="0"/>
+                <a:ea typeface="Courier New" pitchFamily="34" charset="-122"/>
+                <a:cs typeface="Courier New" pitchFamily="34" charset="-120"/>
+              </a:rPr>
+              <a:t> </a:t>
+            </a:r>
+            <a:r>
+              <a:rPr lang="en-US" sz="850" dirty="0">
                 <a:solidFill>
                   <a:srgbClr val="CE9178"/>
                 </a:solidFill>
@@ -15061,31 +15102,20 @@
                 <a:ea typeface="Courier New" pitchFamily="34" charset="-122"/>
                 <a:cs typeface="Courier New" pitchFamily="34" charset="-120"/>
               </a:rPr>
-              <a:t>'Accept Travel'</a:t>
-            </a:r>
-            <a:r>
-              <a:rPr lang="en-US" sz="1050" dirty="0">
-                <a:solidFill>
-                  <a:srgbClr val="CCCCCC"/>
-                </a:solidFill>
-                <a:latin typeface="Courier New" pitchFamily="34" charset="0"/>
-                <a:ea typeface="Courier New" pitchFamily="34" charset="-122"/>
-                <a:cs typeface="Courier New" pitchFamily="34" charset="-120"/>
-              </a:rPr>
-              <a:t> </a:t>
-            </a:r>
-            <a:r>
-              <a:rPr lang="en-US" sz="1050" dirty="0">
-                <a:solidFill>
-                  <a:srgbClr val="CCCCCC"/>
-                </a:solidFill>
-                <a:latin typeface="Courier New" pitchFamily="34" charset="0"/>
-                <a:ea typeface="Courier New" pitchFamily="34" charset="-122"/>
-                <a:cs typeface="Courier New" pitchFamily="34" charset="-120"/>
-              </a:rPr>
-              <a:t>}</a:t>
-            </a:r>
-            <a:endParaRPr lang="en-US" sz="1050" dirty="0"/>
+              <a:t>'SimularPagamento'</a:t>
+            </a:r>
+            <a:r>
+              <a:rPr lang="en-US" sz="850" dirty="0">
+                <a:solidFill>
+                  <a:srgbClr val="CCCCCC"/>
+                </a:solidFill>
+                <a:latin typeface="Courier New" pitchFamily="34" charset="0"/>
+                <a:ea typeface="Courier New" pitchFamily="34" charset="-122"/>
+                <a:cs typeface="Courier New" pitchFamily="34" charset="-120"/>
+              </a:rPr>
+              <a:t>,</a:t>
+            </a:r>
+            <a:endParaRPr lang="en-US" sz="850" dirty="0"/>
           </a:p>
           <a:p>
             <a:pPr indent="0" marL="0">
@@ -15095,17 +15125,160 @@
               <a:buNone/>
             </a:pPr>
             <a:r>
-              <a:rPr lang="en-US" sz="1050" dirty="0">
-                <a:solidFill>
-                  <a:srgbClr val="CCCCCC"/>
-                </a:solidFill>
-                <a:latin typeface="Courier New" pitchFamily="34" charset="0"/>
-                <a:ea typeface="Courier New" pitchFamily="34" charset="-122"/>
-                <a:cs typeface="Courier New" pitchFamily="34" charset="-120"/>
-              </a:rPr>
-              <a:t>]</a:t>
-            </a:r>
-            <a:endParaRPr lang="en-US" sz="1050" dirty="0"/>
+              <a:rPr lang="en-US" sz="850" dirty="0">
+                <a:solidFill>
+                  <a:srgbClr val="CCCCCC"/>
+                </a:solidFill>
+                <a:latin typeface="Courier New" pitchFamily="34" charset="0"/>
+                <a:ea typeface="Courier New" pitchFamily="34" charset="-122"/>
+                <a:cs typeface="Courier New" pitchFamily="34" charset="-120"/>
+              </a:rPr>
+              <a:t>    </a:t>
+            </a:r>
+            <a:r>
+              <a:rPr lang="en-US" sz="850" dirty="0">
+                <a:solidFill>
+                  <a:srgbClr val="CCCCCC"/>
+                </a:solidFill>
+                <a:latin typeface="Courier New" pitchFamily="34" charset="0"/>
+                <a:ea typeface="Courier New" pitchFamily="34" charset="-122"/>
+                <a:cs typeface="Courier New" pitchFamily="34" charset="-120"/>
+              </a:rPr>
+              <a:t>label</a:t>
+            </a:r>
+            <a:r>
+              <a:rPr lang="en-US" sz="850" dirty="0">
+                <a:solidFill>
+                  <a:srgbClr val="CCCCCC"/>
+                </a:solidFill>
+                <a:latin typeface="Courier New" pitchFamily="34" charset="0"/>
+                <a:ea typeface="Courier New" pitchFamily="34" charset="-122"/>
+                <a:cs typeface="Courier New" pitchFamily="34" charset="-120"/>
+              </a:rPr>
+              <a:t>:</a:t>
+            </a:r>
+            <a:r>
+              <a:rPr lang="en-US" sz="850" dirty="0">
+                <a:solidFill>
+                  <a:srgbClr val="CCCCCC"/>
+                </a:solidFill>
+                <a:latin typeface="Courier New" pitchFamily="34" charset="0"/>
+                <a:ea typeface="Courier New" pitchFamily="34" charset="-122"/>
+                <a:cs typeface="Courier New" pitchFamily="34" charset="-120"/>
+              </a:rPr>
+              <a:t> </a:t>
+            </a:r>
+            <a:r>
+              <a:rPr lang="en-US" sz="850" dirty="0">
+                <a:solidFill>
+                  <a:srgbClr val="CE9178"/>
+                </a:solidFill>
+                <a:latin typeface="Courier New" pitchFamily="34" charset="0"/>
+                <a:ea typeface="Courier New" pitchFamily="34" charset="-122"/>
+                <a:cs typeface="Courier New" pitchFamily="34" charset="-120"/>
+              </a:rPr>
+              <a:t>'Efetuar Pagamento'</a:t>
+            </a:r>
+            <a:r>
+              <a:rPr lang="en-US" sz="850" dirty="0">
+                <a:solidFill>
+                  <a:srgbClr val="CCCCCC"/>
+                </a:solidFill>
+                <a:latin typeface="Courier New" pitchFamily="34" charset="0"/>
+                <a:ea typeface="Courier New" pitchFamily="34" charset="-122"/>
+                <a:cs typeface="Courier New" pitchFamily="34" charset="-120"/>
+              </a:rPr>
+              <a:t>,</a:t>
+            </a:r>
+            <a:r>
+              <a:rPr lang="en-US" sz="850" dirty="0">
+                <a:solidFill>
+                  <a:srgbClr val="CCCCCC"/>
+                </a:solidFill>
+                <a:latin typeface="Courier New" pitchFamily="34" charset="0"/>
+                <a:ea typeface="Courier New" pitchFamily="34" charset="-122"/>
+                <a:cs typeface="Courier New" pitchFamily="34" charset="-120"/>
+              </a:rPr>
+              <a:t> </a:t>
+            </a:r>
+            <a:r>
+              <a:rPr lang="en-US" sz="850" dirty="0">
+                <a:solidFill>
+                  <a:srgbClr val="CCCCCC"/>
+                </a:solidFill>
+                <a:latin typeface="Courier New" pitchFamily="34" charset="0"/>
+                <a:ea typeface="Courier New" pitchFamily="34" charset="-122"/>
+                <a:cs typeface="Courier New" pitchFamily="34" charset="-120"/>
+              </a:rPr>
+              <a:t>actionGroupId</a:t>
+            </a:r>
+            <a:r>
+              <a:rPr lang="en-US" sz="850" dirty="0">
+                <a:solidFill>
+                  <a:srgbClr val="CCCCCC"/>
+                </a:solidFill>
+                <a:latin typeface="Courier New" pitchFamily="34" charset="0"/>
+                <a:ea typeface="Courier New" pitchFamily="34" charset="-122"/>
+                <a:cs typeface="Courier New" pitchFamily="34" charset="-120"/>
+              </a:rPr>
+              <a:t>:</a:t>
+            </a:r>
+            <a:r>
+              <a:rPr lang="en-US" sz="850" dirty="0">
+                <a:solidFill>
+                  <a:srgbClr val="CCCCCC"/>
+                </a:solidFill>
+                <a:latin typeface="Courier New" pitchFamily="34" charset="0"/>
+                <a:ea typeface="Courier New" pitchFamily="34" charset="-122"/>
+                <a:cs typeface="Courier New" pitchFamily="34" charset="-120"/>
+              </a:rPr>
+              <a:t> </a:t>
+            </a:r>
+            <a:r>
+              <a:rPr lang="en-US" sz="850" dirty="0">
+                <a:solidFill>
+                  <a:srgbClr val="CE9178"/>
+                </a:solidFill>
+                <a:latin typeface="Courier New" pitchFamily="34" charset="0"/>
+                <a:ea typeface="Courier New" pitchFamily="34" charset="-122"/>
+                <a:cs typeface="Courier New" pitchFamily="34" charset="-120"/>
+              </a:rPr>
+              <a:t>'AcoesPedido'</a:t>
+            </a:r>
+            <a:r>
+              <a:rPr lang="en-US" sz="850" dirty="0">
+                <a:solidFill>
+                  <a:srgbClr val="CCCCCC"/>
+                </a:solidFill>
+                <a:latin typeface="Courier New" pitchFamily="34" charset="0"/>
+                <a:ea typeface="Courier New" pitchFamily="34" charset="-122"/>
+                <a:cs typeface="Courier New" pitchFamily="34" charset="-120"/>
+              </a:rPr>
+              <a:t> </a:t>
+            </a:r>
+            <a:r>
+              <a:rPr lang="en-US" sz="850" dirty="0">
+                <a:solidFill>
+                  <a:srgbClr val="CCCCCC"/>
+                </a:solidFill>
+                <a:latin typeface="Courier New" pitchFamily="34" charset="0"/>
+                <a:ea typeface="Courier New" pitchFamily="34" charset="-122"/>
+                <a:cs typeface="Courier New" pitchFamily="34" charset="-120"/>
+              </a:rPr>
+              <a:t>}</a:t>
+            </a:r>
+            <a:r>
+              <a:rPr lang="en-US" sz="850" dirty="0">
+                <a:solidFill>
+                  <a:srgbClr val="CCCCCC"/>
+                </a:solidFill>
+                <a:latin typeface="Courier New" pitchFamily="34" charset="0"/>
+                <a:ea typeface="Courier New" pitchFamily="34" charset="-122"/>
+                <a:cs typeface="Courier New" pitchFamily="34" charset="-120"/>
+              </a:rPr>
+              <a:t>,</a:t>
+            </a:r>
+            <a:endParaRPr lang="en-US" sz="850" dirty="0"/>
           </a:p>
           <a:p>
             <a:pPr indent="0" marL="0">
@@ -15115,18 +15288,364 @@
               <a:buNone/>
             </a:pPr>
             <a:r>
-              <a:rPr lang="en-US" sz="1050" dirty="0">
-                <a:solidFill>
-                  <a:srgbClr val="CCCCCC"/>
-                </a:solidFill>
-                <a:latin typeface="Courier New" pitchFamily="34" charset="0"/>
-                <a:ea typeface="Courier New" pitchFamily="34" charset="-122"/>
-                <a:cs typeface="Courier New" pitchFamily="34" charset="-120"/>
-              </a:rPr>
-              <a:t>TravelID</a:t>
-            </a:r>
-            <a:r>
-              <a:rPr lang="en-US" sz="1050" dirty="0">
+              <a:rPr lang="en-US" sz="850" dirty="0">
+                <a:solidFill>
+                  <a:srgbClr val="CCCCCC"/>
+                </a:solidFill>
+                <a:latin typeface="Courier New" pitchFamily="34" charset="0"/>
+                <a:ea typeface="Courier New" pitchFamily="34" charset="-122"/>
+                <a:cs typeface="Courier New" pitchFamily="34" charset="-120"/>
+              </a:rPr>
+              <a:t>  </a:t>
+            </a:r>
+            <a:r>
+              <a:rPr lang="en-US" sz="850" dirty="0">
+                <a:solidFill>
+                  <a:srgbClr val="CCCCCC"/>
+                </a:solidFill>
+                <a:latin typeface="Courier New" pitchFamily="34" charset="0"/>
+                <a:ea typeface="Courier New" pitchFamily="34" charset="-122"/>
+                <a:cs typeface="Courier New" pitchFamily="34" charset="-120"/>
+              </a:rPr>
+              <a:t>{</a:t>
+            </a:r>
+            <a:r>
+              <a:rPr lang="en-US" sz="850" dirty="0">
+                <a:solidFill>
+                  <a:srgbClr val="CCCCCC"/>
+                </a:solidFill>
+                <a:latin typeface="Courier New" pitchFamily="34" charset="0"/>
+                <a:ea typeface="Courier New" pitchFamily="34" charset="-122"/>
+                <a:cs typeface="Courier New" pitchFamily="34" charset="-120"/>
+              </a:rPr>
+              <a:t> </a:t>
+            </a:r>
+            <a:r>
+              <a:rPr lang="en-US" sz="850" dirty="0">
+                <a:solidFill>
+                  <a:srgbClr val="CCCCCC"/>
+                </a:solidFill>
+                <a:latin typeface="Courier New" pitchFamily="34" charset="0"/>
+                <a:ea typeface="Courier New" pitchFamily="34" charset="-122"/>
+                <a:cs typeface="Courier New" pitchFamily="34" charset="-120"/>
+              </a:rPr>
+              <a:t>type</a:t>
+            </a:r>
+            <a:r>
+              <a:rPr lang="en-US" sz="850" dirty="0">
+                <a:solidFill>
+                  <a:srgbClr val="CCCCCC"/>
+                </a:solidFill>
+                <a:latin typeface="Courier New" pitchFamily="34" charset="0"/>
+                <a:ea typeface="Courier New" pitchFamily="34" charset="-122"/>
+                <a:cs typeface="Courier New" pitchFamily="34" charset="-120"/>
+              </a:rPr>
+              <a:t>:</a:t>
+            </a:r>
+            <a:r>
+              <a:rPr lang="en-US" sz="850" dirty="0">
+                <a:solidFill>
+                  <a:srgbClr val="CCCCCC"/>
+                </a:solidFill>
+                <a:latin typeface="Courier New" pitchFamily="34" charset="0"/>
+                <a:ea typeface="Courier New" pitchFamily="34" charset="-122"/>
+                <a:cs typeface="Courier New" pitchFamily="34" charset="-120"/>
+              </a:rPr>
+              <a:t> </a:t>
+            </a:r>
+            <a:r>
+              <a:rPr lang="en-US" sz="850" dirty="0">
+                <a:solidFill>
+                  <a:srgbClr val="CCCCCC"/>
+                </a:solidFill>
+                <a:latin typeface="Courier New" pitchFamily="34" charset="0"/>
+                <a:ea typeface="Courier New" pitchFamily="34" charset="-122"/>
+                <a:cs typeface="Courier New" pitchFamily="34" charset="-120"/>
+              </a:rPr>
+              <a:t>#</a:t>
+            </a:r>
+            <a:r>
+              <a:rPr lang="en-US" sz="850" dirty="0">
+                <a:solidFill>
+                  <a:srgbClr val="CCCCCC"/>
+                </a:solidFill>
+                <a:latin typeface="Courier New" pitchFamily="34" charset="0"/>
+                <a:ea typeface="Courier New" pitchFamily="34" charset="-122"/>
+                <a:cs typeface="Courier New" pitchFamily="34" charset="-120"/>
+              </a:rPr>
+              <a:t>FOR_ACTION</a:t>
+            </a:r>
+            <a:r>
+              <a:rPr lang="en-US" sz="850" dirty="0">
+                <a:solidFill>
+                  <a:srgbClr val="CCCCCC"/>
+                </a:solidFill>
+                <a:latin typeface="Courier New" pitchFamily="34" charset="0"/>
+                <a:ea typeface="Courier New" pitchFamily="34" charset="-122"/>
+                <a:cs typeface="Courier New" pitchFamily="34" charset="-120"/>
+              </a:rPr>
+              <a:t>,</a:t>
+            </a:r>
+            <a:r>
+              <a:rPr lang="en-US" sz="850" dirty="0">
+                <a:solidFill>
+                  <a:srgbClr val="CCCCCC"/>
+                </a:solidFill>
+                <a:latin typeface="Courier New" pitchFamily="34" charset="0"/>
+                <a:ea typeface="Courier New" pitchFamily="34" charset="-122"/>
+                <a:cs typeface="Courier New" pitchFamily="34" charset="-120"/>
+              </a:rPr>
+              <a:t> </a:t>
+            </a:r>
+            <a:r>
+              <a:rPr lang="en-US" sz="850" dirty="0">
+                <a:solidFill>
+                  <a:srgbClr val="CCCCCC"/>
+                </a:solidFill>
+                <a:latin typeface="Courier New" pitchFamily="34" charset="0"/>
+                <a:ea typeface="Courier New" pitchFamily="34" charset="-122"/>
+                <a:cs typeface="Courier New" pitchFamily="34" charset="-120"/>
+              </a:rPr>
+              <a:t>dataAction</a:t>
+            </a:r>
+            <a:r>
+              <a:rPr lang="en-US" sz="850" dirty="0">
+                <a:solidFill>
+                  <a:srgbClr val="CCCCCC"/>
+                </a:solidFill>
+                <a:latin typeface="Courier New" pitchFamily="34" charset="0"/>
+                <a:ea typeface="Courier New" pitchFamily="34" charset="-122"/>
+                <a:cs typeface="Courier New" pitchFamily="34" charset="-120"/>
+              </a:rPr>
+              <a:t>:</a:t>
+            </a:r>
+            <a:r>
+              <a:rPr lang="en-US" sz="850" dirty="0">
+                <a:solidFill>
+                  <a:srgbClr val="CCCCCC"/>
+                </a:solidFill>
+                <a:latin typeface="Courier New" pitchFamily="34" charset="0"/>
+                <a:ea typeface="Courier New" pitchFamily="34" charset="-122"/>
+                <a:cs typeface="Courier New" pitchFamily="34" charset="-120"/>
+              </a:rPr>
+              <a:t> </a:t>
+            </a:r>
+            <a:r>
+              <a:rPr lang="en-US" sz="850" dirty="0">
+                <a:solidFill>
+                  <a:srgbClr val="CE9178"/>
+                </a:solidFill>
+                <a:latin typeface="Courier New" pitchFamily="34" charset="0"/>
+                <a:ea typeface="Courier New" pitchFamily="34" charset="-122"/>
+                <a:cs typeface="Courier New" pitchFamily="34" charset="-120"/>
+              </a:rPr>
+              <a:t>'AprovarPedido'</a:t>
+            </a:r>
+            <a:r>
+              <a:rPr lang="en-US" sz="850" dirty="0">
+                <a:solidFill>
+                  <a:srgbClr val="CCCCCC"/>
+                </a:solidFill>
+                <a:latin typeface="Courier New" pitchFamily="34" charset="0"/>
+                <a:ea typeface="Courier New" pitchFamily="34" charset="-122"/>
+                <a:cs typeface="Courier New" pitchFamily="34" charset="-120"/>
+              </a:rPr>
+              <a:t>,</a:t>
+            </a:r>
+            <a:endParaRPr lang="en-US" sz="850" dirty="0"/>
+          </a:p>
+          <a:p>
+            <a:pPr indent="0" marL="0">
+              <a:lnSpc>
+                <a:spcPct val="105000"/>
+              </a:lnSpc>
+              <a:buNone/>
+            </a:pPr>
+            <a:r>
+              <a:rPr lang="en-US" sz="850" dirty="0">
+                <a:solidFill>
+                  <a:srgbClr val="CCCCCC"/>
+                </a:solidFill>
+                <a:latin typeface="Courier New" pitchFamily="34" charset="0"/>
+                <a:ea typeface="Courier New" pitchFamily="34" charset="-122"/>
+                <a:cs typeface="Courier New" pitchFamily="34" charset="-120"/>
+              </a:rPr>
+              <a:t>    </a:t>
+            </a:r>
+            <a:r>
+              <a:rPr lang="en-US" sz="850" dirty="0">
+                <a:solidFill>
+                  <a:srgbClr val="CCCCCC"/>
+                </a:solidFill>
+                <a:latin typeface="Courier New" pitchFamily="34" charset="0"/>
+                <a:ea typeface="Courier New" pitchFamily="34" charset="-122"/>
+                <a:cs typeface="Courier New" pitchFamily="34" charset="-120"/>
+              </a:rPr>
+              <a:t>label</a:t>
+            </a:r>
+            <a:r>
+              <a:rPr lang="en-US" sz="850" dirty="0">
+                <a:solidFill>
+                  <a:srgbClr val="CCCCCC"/>
+                </a:solidFill>
+                <a:latin typeface="Courier New" pitchFamily="34" charset="0"/>
+                <a:ea typeface="Courier New" pitchFamily="34" charset="-122"/>
+                <a:cs typeface="Courier New" pitchFamily="34" charset="-120"/>
+              </a:rPr>
+              <a:t>:</a:t>
+            </a:r>
+            <a:r>
+              <a:rPr lang="en-US" sz="850" dirty="0">
+                <a:solidFill>
+                  <a:srgbClr val="CCCCCC"/>
+                </a:solidFill>
+                <a:latin typeface="Courier New" pitchFamily="34" charset="0"/>
+                <a:ea typeface="Courier New" pitchFamily="34" charset="-122"/>
+                <a:cs typeface="Courier New" pitchFamily="34" charset="-120"/>
+              </a:rPr>
+              <a:t> </a:t>
+            </a:r>
+            <a:r>
+              <a:rPr lang="en-US" sz="850" dirty="0">
+                <a:solidFill>
+                  <a:srgbClr val="CE9178"/>
+                </a:solidFill>
+                <a:latin typeface="Courier New" pitchFamily="34" charset="0"/>
+                <a:ea typeface="Courier New" pitchFamily="34" charset="-122"/>
+                <a:cs typeface="Courier New" pitchFamily="34" charset="-120"/>
+              </a:rPr>
+              <a:t>'Aprovar pedido'</a:t>
+            </a:r>
+            <a:r>
+              <a:rPr lang="en-US" sz="850" dirty="0">
+                <a:solidFill>
+                  <a:srgbClr val="CCCCCC"/>
+                </a:solidFill>
+                <a:latin typeface="Courier New" pitchFamily="34" charset="0"/>
+                <a:ea typeface="Courier New" pitchFamily="34" charset="-122"/>
+                <a:cs typeface="Courier New" pitchFamily="34" charset="-120"/>
+              </a:rPr>
+              <a:t>,</a:t>
+            </a:r>
+            <a:r>
+              <a:rPr lang="en-US" sz="850" dirty="0">
+                <a:solidFill>
+                  <a:srgbClr val="CCCCCC"/>
+                </a:solidFill>
+                <a:latin typeface="Courier New" pitchFamily="34" charset="0"/>
+                <a:ea typeface="Courier New" pitchFamily="34" charset="-122"/>
+                <a:cs typeface="Courier New" pitchFamily="34" charset="-120"/>
+              </a:rPr>
+              <a:t> </a:t>
+            </a:r>
+            <a:r>
+              <a:rPr lang="en-US" sz="850" dirty="0">
+                <a:solidFill>
+                  <a:srgbClr val="CCCCCC"/>
+                </a:solidFill>
+                <a:latin typeface="Courier New" pitchFamily="34" charset="0"/>
+                <a:ea typeface="Courier New" pitchFamily="34" charset="-122"/>
+                <a:cs typeface="Courier New" pitchFamily="34" charset="-120"/>
+              </a:rPr>
+              <a:t>actionGroupId</a:t>
+            </a:r>
+            <a:r>
+              <a:rPr lang="en-US" sz="850" dirty="0">
+                <a:solidFill>
+                  <a:srgbClr val="CCCCCC"/>
+                </a:solidFill>
+                <a:latin typeface="Courier New" pitchFamily="34" charset="0"/>
+                <a:ea typeface="Courier New" pitchFamily="34" charset="-122"/>
+                <a:cs typeface="Courier New" pitchFamily="34" charset="-120"/>
+              </a:rPr>
+              <a:t>:</a:t>
+            </a:r>
+            <a:r>
+              <a:rPr lang="en-US" sz="850" dirty="0">
+                <a:solidFill>
+                  <a:srgbClr val="CCCCCC"/>
+                </a:solidFill>
+                <a:latin typeface="Courier New" pitchFamily="34" charset="0"/>
+                <a:ea typeface="Courier New" pitchFamily="34" charset="-122"/>
+                <a:cs typeface="Courier New" pitchFamily="34" charset="-120"/>
+              </a:rPr>
+              <a:t> </a:t>
+            </a:r>
+            <a:r>
+              <a:rPr lang="en-US" sz="850" dirty="0">
+                <a:solidFill>
+                  <a:srgbClr val="CE9178"/>
+                </a:solidFill>
+                <a:latin typeface="Courier New" pitchFamily="34" charset="0"/>
+                <a:ea typeface="Courier New" pitchFamily="34" charset="-122"/>
+                <a:cs typeface="Courier New" pitchFamily="34" charset="-120"/>
+              </a:rPr>
+              <a:t>'AcoesPedido'</a:t>
+            </a:r>
+            <a:r>
+              <a:rPr lang="en-US" sz="850" dirty="0">
+                <a:solidFill>
+                  <a:srgbClr val="CCCCCC"/>
+                </a:solidFill>
+                <a:latin typeface="Courier New" pitchFamily="34" charset="0"/>
+                <a:ea typeface="Courier New" pitchFamily="34" charset="-122"/>
+                <a:cs typeface="Courier New" pitchFamily="34" charset="-120"/>
+              </a:rPr>
+              <a:t> </a:t>
+            </a:r>
+            <a:r>
+              <a:rPr lang="en-US" sz="850" dirty="0">
+                <a:solidFill>
+                  <a:srgbClr val="CCCCCC"/>
+                </a:solidFill>
+                <a:latin typeface="Courier New" pitchFamily="34" charset="0"/>
+                <a:ea typeface="Courier New" pitchFamily="34" charset="-122"/>
+                <a:cs typeface="Courier New" pitchFamily="34" charset="-120"/>
+              </a:rPr>
+              <a:t>}</a:t>
+            </a:r>
+            <a:endParaRPr lang="en-US" sz="850" dirty="0"/>
+          </a:p>
+          <a:p>
+            <a:pPr indent="0" marL="0">
+              <a:lnSpc>
+                <a:spcPct val="105000"/>
+              </a:lnSpc>
+              <a:buNone/>
+            </a:pPr>
+            <a:r>
+              <a:rPr lang="en-US" sz="850" dirty="0">
+                <a:solidFill>
+                  <a:srgbClr val="CCCCCC"/>
+                </a:solidFill>
+                <a:latin typeface="Courier New" pitchFamily="34" charset="0"/>
+                <a:ea typeface="Courier New" pitchFamily="34" charset="-122"/>
+                <a:cs typeface="Courier New" pitchFamily="34" charset="-120"/>
+              </a:rPr>
+              <a:t>]</a:t>
+            </a:r>
+            <a:endParaRPr lang="en-US" sz="850" dirty="0"/>
+          </a:p>
+          <a:p>
+            <a:pPr indent="0" marL="0">
+              <a:lnSpc>
+                <a:spcPct val="105000"/>
+              </a:lnSpc>
+              <a:buNone/>
+            </a:pPr>
+            <a:r>
+              <a:rPr lang="en-US" sz="850" dirty="0">
+                <a:solidFill>
+                  <a:srgbClr val="CCCCCC"/>
+                </a:solidFill>
+                <a:latin typeface="Courier New" pitchFamily="34" charset="0"/>
+                <a:ea typeface="Courier New" pitchFamily="34" charset="-122"/>
+                <a:cs typeface="Courier New" pitchFamily="34" charset="-120"/>
+              </a:rPr>
+              <a:t>NumeroPedido</a:t>
+            </a:r>
+            <a:r>
+              <a:rPr lang="en-US" sz="850" dirty="0">
                 <a:solidFill>
                   <a:srgbClr val="CCCCCC"/>
                 </a:solidFill>
@@ -15136,7 +15655,7 @@
               </a:rPr>
               <a:t>;</a:t>
             </a:r>
-            <a:endParaRPr lang="en-US" sz="1050" dirty="0"/>
+            <a:endParaRPr lang="en-US" sz="850" dirty="0"/>
           </a:p>
         </p:txBody>
       </p:sp>
@@ -15170,7 +15689,7 @@
                   <a:srgbClr val="556B82"/>
                 </a:solidFill>
               </a:rPr>
-              <a:t>O registro </a:t>
+              <a:t>Cada </a:t>
             </a:r>
             <a:r>
               <a:rPr lang="en-US" sz="1200" dirty="0">
@@ -15189,7 +15708,42 @@
                   <a:srgbClr val="556B82"/>
                 </a:solidFill>
               </a:rPr>
-              <a:t> vira um botão na toolbar; na Object Page, use </a:t>
+              <a:t> vira um botão; </a:t>
+            </a:r>
+            <a:r>
+              <a:rPr lang="en-US" sz="1200" dirty="0">
+                <a:solidFill>
+                  <a:srgbClr val="0064D9"/>
+                </a:solidFill>
+                <a:latin typeface="Courier New" pitchFamily="34" charset="0"/>
+                <a:ea typeface="Courier New" pitchFamily="34" charset="-122"/>
+                <a:cs typeface="Courier New" pitchFamily="34" charset="-120"/>
+              </a:rPr>
+              <a:t>#FOR_ACTION_GROUP</a:t>
+            </a:r>
+            <a:r>
+              <a:rPr lang="en-US" sz="1200" dirty="0">
+                <a:solidFill>
+                  <a:srgbClr val="556B82"/>
+                </a:solidFill>
+              </a:rPr>
+              <a:t> os reúne num menu </a:t>
+            </a:r>
+            <a:r>
+              <a:rPr lang="en-US" sz="1200" b="1" dirty="0">
+                <a:solidFill>
+                  <a:srgbClr val="556B82"/>
+                </a:solidFill>
+              </a:rPr>
+              <a:t>Ações</a:t>
+            </a:r>
+            <a:r>
+              <a:rPr lang="en-US" sz="1200" dirty="0">
+                <a:solidFill>
+                  <a:srgbClr val="556B82"/>
+                </a:solidFill>
+              </a:rPr>
+              <a:t>. Na Object Page, use </a:t>
             </a:r>
             <a:r>
               <a:rPr lang="en-US" sz="1200" dirty="0">
